--- a/03-build/pptx/C6plus_U6_docente.pptx
+++ b/03-build/pptx/C6plus_U6_docente.pptx
@@ -6650,7 +6650,6 @@
               <a:srgbClr val="E4E3DE"/>
             </a:solidFill>
           </a:ln>
-          <a:effectLst/>
           <a:effectLst>
             <a:outerShdw blurRad="90000" dist="38000" dir="5400000" rotWithShape="0">
               <a:srgbClr val="20242E">
@@ -6884,7 +6883,6 @@
               <a:srgbClr val="E4E3DE"/>
             </a:solidFill>
           </a:ln>
-          <a:effectLst/>
           <a:effectLst>
             <a:outerShdw blurRad="90000" dist="38000" dir="5400000" rotWithShape="0">
               <a:srgbClr val="20242E">
@@ -7118,7 +7116,6 @@
               <a:srgbClr val="E4E3DE"/>
             </a:solidFill>
           </a:ln>
-          <a:effectLst/>
           <a:effectLst>
             <a:outerShdw blurRad="90000" dist="38000" dir="5400000" rotWithShape="0">
               <a:srgbClr val="20242E">
@@ -7352,7 +7349,6 @@
               <a:srgbClr val="E4E3DE"/>
             </a:solidFill>
           </a:ln>
-          <a:effectLst/>
           <a:effectLst>
             <a:outerShdw blurRad="90000" dist="38000" dir="5400000" rotWithShape="0">
               <a:srgbClr val="20242E">
@@ -15583,7 +15579,6 @@
               <a:srgbClr val="E4E3DE"/>
             </a:solidFill>
           </a:ln>
-          <a:effectLst/>
           <a:effectLst>
             <a:outerShdw blurRad="90000" dist="38000" dir="5400000" rotWithShape="0">
               <a:srgbClr val="20242E">
@@ -16262,7 +16257,6 @@
               <a:srgbClr val="7C56A9"/>
             </a:solidFill>
           </a:ln>
-          <a:effectLst/>
           <a:effectLst>
             <a:outerShdw blurRad="90000" dist="38000" dir="5400000" rotWithShape="0">
               <a:srgbClr val="20242E">
@@ -23180,7 +23174,6 @@
               <a:srgbClr val="7C56A9"/>
             </a:solidFill>
           </a:ln>
-          <a:effectLst/>
           <a:effectLst>
             <a:outerShdw blurRad="90000" dist="38000" dir="5400000" rotWithShape="0">
               <a:srgbClr val="20242E">
@@ -23414,7 +23407,6 @@
               <a:srgbClr val="7C56A9"/>
             </a:solidFill>
           </a:ln>
-          <a:effectLst/>
           <a:effectLst>
             <a:outerShdw blurRad="90000" dist="38000" dir="5400000" rotWithShape="0">
               <a:srgbClr val="20242E">
@@ -23648,7 +23640,6 @@
               <a:srgbClr val="7C56A9"/>
             </a:solidFill>
           </a:ln>
-          <a:effectLst/>
           <a:effectLst>
             <a:outerShdw blurRad="90000" dist="38000" dir="5400000" rotWithShape="0">
               <a:srgbClr val="20242E">
@@ -29026,7 +29017,6 @@
               <a:srgbClr val="7C56A9"/>
             </a:solidFill>
           </a:ln>
-          <a:effectLst/>
           <a:effectLst>
             <a:outerShdw blurRad="90000" dist="38000" dir="5400000" rotWithShape="0">
               <a:srgbClr val="20242E">
@@ -29329,7 +29319,6 @@
               <a:srgbClr val="7C56A9"/>
             </a:solidFill>
           </a:ln>
-          <a:effectLst/>
           <a:effectLst>
             <a:outerShdw blurRad="90000" dist="38000" dir="5400000" rotWithShape="0">
               <a:srgbClr val="20242E">
@@ -29632,7 +29621,6 @@
               <a:srgbClr val="7C56A9"/>
             </a:solidFill>
           </a:ln>
-          <a:effectLst/>
           <a:effectLst>
             <a:outerShdw blurRad="90000" dist="38000" dir="5400000" rotWithShape="0">
               <a:srgbClr val="20242E">
@@ -29935,7 +29923,6 @@
               <a:srgbClr val="7C56A9"/>
             </a:solidFill>
           </a:ln>
-          <a:effectLst/>
           <a:effectLst>
             <a:outerShdw blurRad="90000" dist="38000" dir="5400000" rotWithShape="0">
               <a:srgbClr val="20242E">
@@ -30238,7 +30225,6 @@
               <a:srgbClr val="7C56A9"/>
             </a:solidFill>
           </a:ln>
-          <a:effectLst/>
           <a:effectLst>
             <a:outerShdw blurRad="90000" dist="38000" dir="5400000" rotWithShape="0">
               <a:srgbClr val="20242E">
@@ -30541,7 +30527,6 @@
               <a:srgbClr val="5B3E83"/>
             </a:solidFill>
           </a:ln>
-          <a:effectLst/>
           <a:effectLst>
             <a:outerShdw blurRad="90000" dist="38000" dir="5400000" rotWithShape="0">
               <a:srgbClr val="20242E">
@@ -30844,7 +30829,6 @@
               <a:srgbClr val="5B3E83"/>
             </a:solidFill>
           </a:ln>
-          <a:effectLst/>
           <a:effectLst>
             <a:outerShdw blurRad="90000" dist="38000" dir="5400000" rotWithShape="0">
               <a:srgbClr val="20242E">
@@ -31147,7 +31131,6 @@
               <a:srgbClr val="5B3E83"/>
             </a:solidFill>
           </a:ln>
-          <a:effectLst/>
           <a:effectLst>
             <a:outerShdw blurRad="90000" dist="38000" dir="5400000" rotWithShape="0">
               <a:srgbClr val="20242E">
@@ -31974,7 +31957,6 @@
           <a:ln>
             <a:noFill/>
           </a:ln>
-          <a:effectLst/>
           <a:effectLst>
             <a:outerShdw blurRad="90000" dist="38000" dir="5400000" rotWithShape="0">
               <a:srgbClr val="20242E">
@@ -33687,7 +33669,6 @@
           <a:ln>
             <a:noFill/>
           </a:ln>
-          <a:effectLst/>
           <a:effectLst>
             <a:outerShdw blurRad="90000" dist="38000" dir="5400000" rotWithShape="0">
               <a:srgbClr val="20242E">
@@ -33830,7 +33811,6 @@
           <a:ln>
             <a:noFill/>
           </a:ln>
-          <a:effectLst/>
           <a:effectLst>
             <a:outerShdw blurRad="90000" dist="38000" dir="5400000" rotWithShape="0">
               <a:srgbClr val="20242E">
@@ -33973,7 +33953,6 @@
           <a:ln>
             <a:noFill/>
           </a:ln>
-          <a:effectLst/>
           <a:effectLst>
             <a:outerShdw blurRad="90000" dist="38000" dir="5400000" rotWithShape="0">
               <a:srgbClr val="20242E">
@@ -34116,7 +34095,6 @@
           <a:ln>
             <a:noFill/>
           </a:ln>
-          <a:effectLst/>
           <a:effectLst>
             <a:outerShdw blurRad="90000" dist="38000" dir="5400000" rotWithShape="0">
               <a:srgbClr val="20242E">
@@ -34259,7 +34237,6 @@
           <a:ln>
             <a:noFill/>
           </a:ln>
-          <a:effectLst/>
           <a:effectLst>
             <a:outerShdw blurRad="90000" dist="38000" dir="5400000" rotWithShape="0">
               <a:srgbClr val="20242E">
@@ -38483,7 +38460,6 @@
           <a:ln>
             <a:noFill/>
           </a:ln>
-          <a:effectLst/>
           <a:effectLst>
             <a:outerShdw blurRad="90000" dist="38000" dir="5400000" rotWithShape="0">
               <a:srgbClr val="20242E">
@@ -45312,7 +45288,6 @@
           <a:ln>
             <a:noFill/>
           </a:ln>
-          <a:effectLst/>
           <a:effectLst>
             <a:outerShdw blurRad="90000" dist="38000" dir="5400000" rotWithShape="0">
               <a:srgbClr val="20242E">
@@ -49448,7 +49423,6 @@
               <a:srgbClr val="7C56A9"/>
             </a:solidFill>
           </a:ln>
-          <a:effectLst/>
           <a:effectLst>
             <a:outerShdw blurRad="90000" dist="38000" dir="5400000" rotWithShape="0">
               <a:srgbClr val="20242E">

--- a/03-build/pptx/C6plus_U6_docente.pptx
+++ b/03-build/pptx/C6plus_U6_docente.pptx
@@ -11,6 +11,9 @@
     <p:sldId id="259" r:id="rId11"/>
     <p:sldId id="260" r:id="rId12"/>
     <p:sldId id="261" r:id="rId13"/>
+    <p:sldId id="277" r:id="rId29"/>
+    <p:sldId id="278" r:id="rId30"/>
+    <p:sldId id="279" r:id="rId31"/>
     <p:sldId id="262" r:id="rId14"/>
     <p:sldId id="263" r:id="rId15"/>
     <p:sldId id="264" r:id="rId16"/>
@@ -1556,6 +1559,255 @@
           </p:nvPr>
         </p:nvSpPr>
         <p:spPr/>
+      </p:sp>
+    </p:spTree>
+  </p:cSld>
+  <p:clrMapOvr>
+    <a:masterClrMapping/>
+  </p:clrMapOvr>
+</p:notes>
+</file>
+
+<file path=ppt/notesSlides/notesSlide22.xml><?xml version="1.0" encoding="utf-8"?>
+<p:notes xmlns:a="http://schemas.openxmlformats.org/drawingml/2006/main" xmlns:p="http://schemas.openxmlformats.org/presentationml/2006/main" xmlns:r="http://schemas.openxmlformats.org/officeDocument/2006/relationships">
+  <p:cSld>
+    <p:spTree>
+      <p:nvGrpSpPr>
+        <p:cNvPr id="1" name=""/>
+        <p:cNvGrpSpPr/>
+        <p:nvPr/>
+      </p:nvGrpSpPr>
+      <p:grpSpPr>
+        <a:xfrm>
+          <a:off x="0" y="0"/>
+          <a:ext cx="0" cy="0"/>
+          <a:chOff x="0" y="0"/>
+          <a:chExt cx="0" cy="0"/>
+        </a:xfrm>
+      </p:grpSpPr>
+      <p:sp>
+        <p:nvSpPr>
+          <p:cNvPr id="2" name="Slide Image Placeholder 1"/>
+          <p:cNvSpPr>
+            <a:spLocks noGrp="1"/>
+          </p:cNvSpPr>
+          <p:nvPr>
+            <p:ph type="sldImg" idx="2"/>
+          </p:nvPr>
+        </p:nvSpPr>
+        <p:spPr/>
+      </p:sp>
+      <p:sp>
+        <p:nvSpPr>
+          <p:cNvPr id="3" name="Notes Placeholder 2"/>
+          <p:cNvSpPr>
+            <a:spLocks noGrp="1"/>
+          </p:cNvSpPr>
+          <p:nvPr>
+            <p:ph type="body" idx="3" sz="quarter"/>
+          </p:nvPr>
+        </p:nvSpPr>
+        <p:spPr/>
+        <p:txBody>
+          <a:bodyPr/>
+          <a:lstStyle/>
+          <a:p>
+            <a:r>
+              <a:t>RETO 2 · El juguete que lo cambió todo — ✍️ creatieve beperking</a:t>
+            </a:r>
+          </a:p>
+          <a:p>
+            <a:r>
+              <a:t>OPDRACHT: Vertel over je speelgoed in twee delen: hoe het was, en wat er één keer gebeurde.</a:t>
+            </a:r>
+          </a:p>
+          <a:p>
+            <a:r>
+              <a:t>DE REGEL: Precies twee delen. Het eerste helemaal in het imperfecto en zonder één gebeurtenis; het tweede begint met «un día» en staat in het indefinido. Wie mengt, begint opnieuw.</a:t>
+            </a:r>
+          </a:p>
+          <a:p>
+            <a:r>
+              <a:t>VERLOOP: Elige un objeto de tu infancia. | Parte 1: cómo era, dónde estaba, qué hacías con él. Todo en imperfecto. | Parte 2: un día … Todo en indefinido. | Cuéntalo en un minuto, sin notas.</a:t>
+            </a:r>
+          </a:p>
+          <a:p>
+            <a:r>
+              <a:t>SLEUTEL: De strikte tweedeling is een steiger, geen stijl: door de tijden te scheiden vóór je ze leert mengen (in reto 5), wordt het contrast eerst voelbaar en dan pas subtiel.  ||  «Y desde ese día…» dwingt tot een gevolg dat nog geldt, en dus tot een derde tijd — het presente. Dat is de mooiste zin die deze reto oplevert.  ||  Toets de zuiverheid van beide delen. Eén indefinido in deel één is de meest voorkomende fout en meteen het beste bespreekpunt.</a:t>
+            </a:r>
+          </a:p>
+          <a:p>
+            <a:r>
+              <a:t>NOTA: Niemand hoeft een bijzonder verhaal te hebben. «Un día se rompió» is een volwaardig tweede deel — het gaat om de tijden, niet om het drama.</a:t>
+            </a:r>
+          </a:p>
+        </p:txBody>
+      </p:sp>
+    </p:spTree>
+  </p:cSld>
+  <p:clrMapOvr>
+    <a:masterClrMapping/>
+  </p:clrMapOvr>
+</p:notes>
+</file>
+
+<file path=ppt/notesSlides/notesSlide23.xml><?xml version="1.0" encoding="utf-8"?>
+<p:notes xmlns:a="http://schemas.openxmlformats.org/drawingml/2006/main" xmlns:p="http://schemas.openxmlformats.org/presentationml/2006/main" xmlns:r="http://schemas.openxmlformats.org/officeDocument/2006/relationships">
+  <p:cSld>
+    <p:spTree>
+      <p:nvGrpSpPr>
+        <p:cNvPr id="1" name=""/>
+        <p:cNvGrpSpPr/>
+        <p:nvPr/>
+      </p:nvGrpSpPr>
+      <p:grpSpPr>
+        <a:xfrm>
+          <a:off x="0" y="0"/>
+          <a:ext cx="0" cy="0"/>
+          <a:chOff x="0" y="0"/>
+          <a:chExt cx="0" cy="0"/>
+        </a:xfrm>
+      </p:grpSpPr>
+      <p:sp>
+        <p:nvSpPr>
+          <p:cNvPr id="2" name="Slide Image Placeholder 1"/>
+          <p:cNvSpPr>
+            <a:spLocks noGrp="1"/>
+          </p:cNvSpPr>
+          <p:nvPr>
+            <p:ph type="sldImg" idx="2"/>
+          </p:nvPr>
+        </p:nvSpPr>
+        <p:spPr/>
+      </p:sp>
+      <p:sp>
+        <p:nvSpPr>
+          <p:cNvPr id="3" name="Notes Placeholder 2"/>
+          <p:cNvSpPr>
+            <a:spLocks noGrp="1"/>
+          </p:cNvSpPr>
+          <p:nvPr>
+            <p:ph type="body" idx="3" sz="quarter"/>
+          </p:nvPr>
+        </p:nvSpPr>
+        <p:spPr/>
+        <p:txBody>
+          <a:bodyPr/>
+          <a:lstStyle/>
+          <a:p>
+            <a:r>
+              <a:t>RETO 3 · Antes se podía — 🔬 onderzoek &amp; data</a:t>
+            </a:r>
+          </a:p>
+          <a:p>
+            <a:r>
+              <a:t>OPDRACHT: Interview en presenteer in de derde persoon, met het imperfecto.</a:t>
+            </a:r>
+          </a:p>
+          <a:p>
+            <a:r>
+              <a:t>DE REGEL: Je vertelt het na in de derde persoon — dus niet «yo podía», maar «mi tía podía». En elk antwoord krijgt een «ahora ya no»-zin ernaast, anders is het geen contrast.</a:t>
+            </a:r>
+          </a:p>
+          <a:p>
+            <a:r>
+              <a:t>VERLOOP: Preparad cinco preguntas con «¿se podía …?». | Entrevistad a un adulto, en neerlandés si hace falta. | Traducid las respuestas al español, en tercera persona. | Presentad tres contrastes: antes … / ahora ya no …</a:t>
+            </a:r>
+          </a:p>
+          <a:p>
+            <a:r>
+              <a:t>SLEUTEL: De onpersoonlijke «se podía» is de eenvoudigste ingang tot het imperfecto: geen persoonsuitgang om te kiezen, en toch de volle betekenis van «hoe het toen was».  ||  De verplichte «ahora ya no»-zin maakt van een anekdote een contrast — en dat contrast is de leerstof.  ||  Alle vijf de vragen staan in de onpersoonlijke «se podía»-vorm: geen persoonsuitgang om te kiezen, en toch de volle betekenis. Dat is de eenvoudigste ingang tot het imperfecto.  ||  Toets de derde persoon. Wie in «yo» vertelt, heeft het interview niet bemiddeld maar overgenomen.</a:t>
+            </a:r>
+          </a:p>
+          <a:p>
+            <a:r>
+              <a:t>NOTA: De antwoorden gaan vaak over veiligheid, roken of vrijheid. Laat het gesprek zijn gang gaan: dit is een van de weinige opdrachten waar leerlingen thuis over praten.</a:t>
+            </a:r>
+          </a:p>
+        </p:txBody>
+      </p:sp>
+    </p:spTree>
+  </p:cSld>
+  <p:clrMapOvr>
+    <a:masterClrMapping/>
+  </p:clrMapOvr>
+</p:notes>
+</file>
+
+<file path=ppt/notesSlides/notesSlide24.xml><?xml version="1.0" encoding="utf-8"?>
+<p:notes xmlns:a="http://schemas.openxmlformats.org/drawingml/2006/main" xmlns:p="http://schemas.openxmlformats.org/presentationml/2006/main" xmlns:r="http://schemas.openxmlformats.org/officeDocument/2006/relationships">
+  <p:cSld>
+    <p:spTree>
+      <p:nvGrpSpPr>
+        <p:cNvPr id="1" name=""/>
+        <p:cNvGrpSpPr/>
+        <p:nvPr/>
+      </p:nvGrpSpPr>
+      <p:grpSpPr>
+        <a:xfrm>
+          <a:off x="0" y="0"/>
+          <a:ext cx="0" cy="0"/>
+          <a:chOff x="0" y="0"/>
+          <a:chExt cx="0" cy="0"/>
+        </a:xfrm>
+      </p:grpSpPr>
+      <p:sp>
+        <p:nvSpPr>
+          <p:cNvPr id="2" name="Slide Image Placeholder 1"/>
+          <p:cNvSpPr>
+            <a:spLocks noGrp="1"/>
+          </p:cNvSpPr>
+          <p:nvPr>
+            <p:ph type="sldImg" idx="2"/>
+          </p:nvPr>
+        </p:nvSpPr>
+        <p:spPr/>
+      </p:sp>
+      <p:sp>
+        <p:nvSpPr>
+          <p:cNvPr id="3" name="Notes Placeholder 2"/>
+          <p:cNvSpPr>
+            <a:spLocks noGrp="1"/>
+          </p:cNvSpPr>
+          <p:nvPr>
+            <p:ph type="body" idx="3" sz="quarter"/>
+          </p:nvPr>
+        </p:nvSpPr>
+        <p:spPr/>
+        <p:txBody>
+          <a:bodyPr/>
+          <a:lstStyle/>
+          <a:p>
+            <a:r>
+              <a:t>RETO 9 · El juicio a la nostalgia — ⚖️ onderhandeling &amp; dilemma</a:t>
+            </a:r>
+          </a:p>
+          <a:p>
+            <a:r>
+              <a:t>OPDRACHT: Debatteer. Elk argument bevat een imperfecto en een comparativo.</a:t>
+            </a:r>
+          </a:p>
+          <a:p>
+            <a:r>
+              <a:t>DE REGEL: Een argument zonder imperfecto én zonder comparativo telt niet mee. En je mag geen argument herhalen dat al gevallen is — ook niet met andere woorden.</a:t>
+            </a:r>
+          </a:p>
+          <a:p>
+            <a:r>
+              <a:t>VERLOOP: Repartid: acusación (era peor) y defensa (era mejor). | Cinco minutos para preparar cuatro argumentos cada uno. | Debate: por turnos, sin interrumpir. | El jurado (el resto) vota y explica por qué. | Al final: ¿cuál era el argumento más fuerte del otro lado?</a:t>
+            </a:r>
+          </a:p>
+          <a:p>
+            <a:r>
+              <a:t>SLEUTEL: De laatste stap — het sterkste argument van de tegenpartij benoemen — is de eigenlijke opdracht. Debatteren kan iedereen; toegeven waar de ander gelijk heeft, is aanzet-B1.  ||  De zes thema's zijn zo geformuleerd dat elk twee kanten heeft. Het milieuthema is het duidelijkst: minder consumptie én bijna geen recyclage.  ||  De harde regel (imperfecto plus comparativo per argument) maakt het debat traag in het begin en scherp op het eind. Houd hem vol.  ||  Toets het aantal geldige argumenten per kant en de slotzin van elke leerling.</a:t>
+            </a:r>
+          </a:p>
+          <a:p>
+            <a:r>
+              <a:t>NOTA: Kruis de rollen bewust: wie zelf denkt dat vroeger beter was, verdedigt het tegendeel. De kwaliteit van het debat gaat er meetbaar op vooruit.</a:t>
+            </a:r>
+          </a:p>
+        </p:txBody>
       </p:sp>
     </p:spTree>
   </p:cSld>
@@ -34541,6 +34793,4278 @@
                 <a:latin typeface="Inter"/>
               </a:rPr>
               <a:t>21</a:t>
+            </a:r>
+          </a:p>
+        </p:txBody>
+      </p:sp>
+    </p:spTree>
+  </p:cSld>
+  <p:clrMapOvr>
+    <a:masterClrMapping/>
+  </p:clrMapOvr>
+</p:sld>
+</file>
+
+<file path=ppt/slides/slide22.xml><?xml version="1.0" encoding="utf-8"?>
+<p:sld xmlns:a="http://schemas.openxmlformats.org/drawingml/2006/main" xmlns:p="http://schemas.openxmlformats.org/presentationml/2006/main" xmlns:r="http://schemas.openxmlformats.org/officeDocument/2006/relationships">
+  <p:cSld>
+    <p:spTree>
+      <p:nvGrpSpPr>
+        <p:cNvPr id="1" name=""/>
+        <p:cNvGrpSpPr/>
+        <p:nvPr/>
+      </p:nvGrpSpPr>
+      <p:grpSpPr/>
+      <p:sp>
+        <p:nvSpPr>
+          <p:cNvPr id="2" name="Fondo"/>
+          <p:cNvSpPr/>
+          <p:nvPr/>
+        </p:nvSpPr>
+        <p:spPr>
+          <a:xfrm>
+            <a:off x="0" y="0"/>
+            <a:ext cx="12191695" cy="6858000"/>
+          </a:xfrm>
+          <a:prstGeom prst="rect">
+            <a:avLst/>
+          </a:prstGeom>
+          <a:solidFill>
+            <a:srgbClr val="FCFBF8"/>
+          </a:solidFill>
+          <a:ln>
+            <a:noFill/>
+          </a:ln>
+          <a:effectLst/>
+        </p:spPr>
+        <p:style>
+          <a:lnRef idx="1">
+            <a:schemeClr val="accent1"/>
+          </a:lnRef>
+          <a:fillRef idx="3">
+            <a:schemeClr val="accent1"/>
+          </a:fillRef>
+          <a:effectRef idx="2">
+            <a:schemeClr val="accent1"/>
+          </a:effectRef>
+          <a:fontRef idx="minor">
+            <a:schemeClr val="lt1"/>
+          </a:fontRef>
+        </p:style>
+        <p:txBody>
+          <a:bodyPr rtlCol="0" anchor="ctr"/>
+          <a:lstStyle/>
+          <a:p/>
+        </p:txBody>
+      </p:sp>
+      <p:sp>
+        <p:nvSpPr>
+          <p:cNvPr id="3" name="Cabecera"/>
+          <p:cNvSpPr/>
+          <p:nvPr/>
+        </p:nvSpPr>
+        <p:spPr>
+          <a:xfrm>
+            <a:off x="0" y="0"/>
+            <a:ext cx="12191695" cy="1078992"/>
+          </a:xfrm>
+          <a:prstGeom prst="rect">
+            <a:avLst/>
+          </a:prstGeom>
+          <a:solidFill>
+            <a:srgbClr val="7C56A9"/>
+          </a:solidFill>
+          <a:ln>
+            <a:noFill/>
+          </a:ln>
+          <a:effectLst/>
+        </p:spPr>
+        <p:style>
+          <a:lnRef idx="1">
+            <a:schemeClr val="accent1"/>
+          </a:lnRef>
+          <a:fillRef idx="3">
+            <a:schemeClr val="accent1"/>
+          </a:fillRef>
+          <a:effectRef idx="2">
+            <a:schemeClr val="accent1"/>
+          </a:effectRef>
+          <a:fontRef idx="minor">
+            <a:schemeClr val="lt1"/>
+          </a:fontRef>
+        </p:style>
+        <p:txBody>
+          <a:bodyPr rtlCol="0" anchor="ctr"/>
+          <a:lstStyle/>
+          <a:p/>
+        </p:txBody>
+      </p:sp>
+      <p:sp>
+        <p:nvSpPr>
+          <p:cNvPr id="4" name="Chip"/>
+          <p:cNvSpPr/>
+          <p:nvPr/>
+        </p:nvSpPr>
+        <p:spPr>
+          <a:xfrm>
+            <a:off x="457200" y="182880"/>
+            <a:ext cx="3017520" cy="292608"/>
+          </a:xfrm>
+          <a:prstGeom prst="roundRect">
+            <a:avLst>
+              <a:gd name="adj" fmla="val 50000"/>
+            </a:avLst>
+          </a:prstGeom>
+          <a:solidFill>
+            <a:srgbClr val="FFFFFF"/>
+          </a:solidFill>
+          <a:ln>
+            <a:noFill/>
+          </a:ln>
+          <a:effectLst/>
+        </p:spPr>
+        <p:style>
+          <a:lnRef idx="1">
+            <a:schemeClr val="accent1"/>
+          </a:lnRef>
+          <a:fillRef idx="3">
+            <a:schemeClr val="accent1"/>
+          </a:fillRef>
+          <a:effectRef idx="2">
+            <a:schemeClr val="accent1"/>
+          </a:effectRef>
+          <a:fontRef idx="minor">
+            <a:schemeClr val="lt1"/>
+          </a:fontRef>
+        </p:style>
+        <p:txBody>
+          <a:bodyPr rtlCol="0" anchor="ctr"/>
+          <a:lstStyle/>
+          <a:p/>
+        </p:txBody>
+      </p:sp>
+      <p:sp>
+        <p:nvSpPr>
+          <p:cNvPr id="5" name="ChipTxt"/>
+          <p:cNvSpPr txBox="1"/>
+          <p:nvPr/>
+        </p:nvSpPr>
+        <p:spPr>
+          <a:xfrm>
+            <a:off x="457200" y="173736"/>
+            <a:ext cx="3017520" cy="310896"/>
+          </a:xfrm>
+          <a:prstGeom prst="rect">
+            <a:avLst/>
+          </a:prstGeom>
+          <a:noFill/>
+        </p:spPr>
+        <p:txBody>
+          <a:bodyPr wrap="square" anchor="ctr" lIns="45720" rIns="45720" tIns="27432" bIns="27432">
+            <a:normAutofit/>
+          </a:bodyPr>
+          <a:lstStyle/>
+          <a:p>
+            <a:pPr algn="ctr"/>
+            <a:r>
+              <a:rPr sz="950" b="1">
+                <a:solidFill>
+                  <a:srgbClr val="5B3E83"/>
+                </a:solidFill>
+                <a:latin typeface="Inter"/>
+              </a:rPr>
+              <a:t>RETO 2 · CREATIEVE BEPERKING</a:t>
+            </a:r>
+          </a:p>
+        </p:txBody>
+      </p:sp>
+      <p:sp>
+        <p:nvSpPr>
+          <p:cNvPr id="6" name="Titulo"/>
+          <p:cNvSpPr txBox="1"/>
+          <p:nvPr/>
+        </p:nvSpPr>
+        <p:spPr>
+          <a:xfrm>
+            <a:off x="457200" y="502920"/>
+            <a:ext cx="8412480" cy="475488"/>
+          </a:xfrm>
+          <a:prstGeom prst="rect">
+            <a:avLst/>
+          </a:prstGeom>
+          <a:noFill/>
+        </p:spPr>
+        <p:txBody>
+          <a:bodyPr wrap="square" anchor="t" lIns="45720" rIns="45720" tIns="27432" bIns="27432">
+            <a:normAutofit/>
+          </a:bodyPr>
+          <a:lstStyle/>
+          <a:p>
+            <a:pPr algn="l"/>
+            <a:r>
+              <a:rPr sz="2700" b="1">
+                <a:solidFill>
+                  <a:srgbClr val="FFFFFF"/>
+                </a:solidFill>
+                <a:latin typeface="Bricolage Grotesque"/>
+              </a:rPr>
+              <a:t>El juguete que lo cambió todo</a:t>
+            </a:r>
+          </a:p>
+        </p:txBody>
+      </p:sp>
+      <p:sp>
+        <p:nvSpPr>
+          <p:cNvPr id="7" name="Badges"/>
+          <p:cNvSpPr txBox="1"/>
+          <p:nvPr/>
+        </p:nvSpPr>
+        <p:spPr>
+          <a:xfrm>
+            <a:off x="9052560" y="256032"/>
+            <a:ext cx="2651760" cy="640080"/>
+          </a:xfrm>
+          <a:prstGeom prst="rect">
+            <a:avLst/>
+          </a:prstGeom>
+          <a:noFill/>
+        </p:spPr>
+        <p:txBody>
+          <a:bodyPr wrap="square" anchor="t" lIns="45720" rIns="45720" tIns="27432" bIns="27432">
+            <a:normAutofit/>
+          </a:bodyPr>
+          <a:lstStyle/>
+          <a:p>
+            <a:pPr algn="r"/>
+            <a:r>
+              <a:rPr sz="1000">
+                <a:solidFill>
+                  <a:srgbClr val="EEE8F5"/>
+                </a:solidFill>
+                <a:latin typeface="Inter"/>
+              </a:rPr>
+              <a:t>👤 Solo</a:t>
+            </a:r>
+          </a:p>
+          <a:p>
+            <a:pPr algn="r"/>
+            <a:r>
+              <a:rPr sz="1000">
+                <a:solidFill>
+                  <a:srgbClr val="EEE8F5"/>
+                </a:solidFill>
+                <a:latin typeface="Inter"/>
+              </a:rPr>
+              <a:t>± 12 min · ★★☆</a:t>
+            </a:r>
+          </a:p>
+        </p:txBody>
+      </p:sp>
+      <p:sp>
+        <p:nvSpPr>
+          <p:cNvPr id="8" name="Gancho"/>
+          <p:cNvSpPr txBox="1"/>
+          <p:nvPr/>
+        </p:nvSpPr>
+        <p:spPr>
+          <a:xfrm>
+            <a:off x="457200" y="1225296"/>
+            <a:ext cx="11274552" cy="566928"/>
+          </a:xfrm>
+          <a:prstGeom prst="rect">
+            <a:avLst/>
+          </a:prstGeom>
+          <a:noFill/>
+        </p:spPr>
+        <p:txBody>
+          <a:bodyPr wrap="square" anchor="t" lIns="45720" rIns="45720" tIns="27432" bIns="27432">
+            <a:normAutofit/>
+          </a:bodyPr>
+          <a:lstStyle/>
+          <a:p>
+            <a:pPr algn="l"/>
+            <a:r>
+              <a:rPr sz="1600" b="1">
+                <a:solidFill>
+                  <a:srgbClr val="5B3E83"/>
+                </a:solidFill>
+                <a:latin typeface="Bricolage Grotesque"/>
+              </a:rPr>
+              <a:t>Cómo era siempre. Y el día que pasó algo.</a:t>
+            </a:r>
+          </a:p>
+          <a:p>
+            <a:pPr algn="l"/>
+            <a:r>
+              <a:rPr sz="1100" i="1">
+                <a:solidFill>
+                  <a:srgbClr val="6A6E78"/>
+                </a:solidFill>
+                <a:latin typeface="Inter"/>
+              </a:rPr>
+              <a:t>Hoe het altijd wás. En de dag dat er iets gebeurde.</a:t>
+            </a:r>
+          </a:p>
+        </p:txBody>
+      </p:sp>
+      <p:sp>
+        <p:nvSpPr>
+          <p:cNvPr id="9" name="ReglaCaja"/>
+          <p:cNvSpPr/>
+          <p:nvPr/>
+        </p:nvSpPr>
+        <p:spPr>
+          <a:xfrm>
+            <a:off x="457200" y="1847088"/>
+            <a:ext cx="11274552" cy="658368"/>
+          </a:xfrm>
+          <a:prstGeom prst="roundRect">
+            <a:avLst>
+              <a:gd name="adj" fmla="val 5000"/>
+            </a:avLst>
+          </a:prstGeom>
+          <a:solidFill>
+            <a:srgbClr val="FBF3D6"/>
+          </a:solidFill>
+          <a:ln>
+            <a:noFill/>
+          </a:ln>
+          <a:effectLst/>
+        </p:spPr>
+        <p:style>
+          <a:lnRef idx="1">
+            <a:schemeClr val="accent1"/>
+          </a:lnRef>
+          <a:fillRef idx="3">
+            <a:schemeClr val="accent1"/>
+          </a:fillRef>
+          <a:effectRef idx="2">
+            <a:schemeClr val="accent1"/>
+          </a:effectRef>
+          <a:fontRef idx="minor">
+            <a:schemeClr val="lt1"/>
+          </a:fontRef>
+        </p:style>
+        <p:txBody>
+          <a:bodyPr rtlCol="0" anchor="ctr"/>
+          <a:lstStyle/>
+          <a:p/>
+        </p:txBody>
+      </p:sp>
+      <p:sp>
+        <p:nvSpPr>
+          <p:cNvPr id="10" name="ReglaTxt"/>
+          <p:cNvSpPr txBox="1"/>
+          <p:nvPr/>
+        </p:nvSpPr>
+        <p:spPr>
+          <a:xfrm>
+            <a:off x="603504" y="1883664"/>
+            <a:ext cx="10972800" cy="585216"/>
+          </a:xfrm>
+          <a:prstGeom prst="rect">
+            <a:avLst/>
+          </a:prstGeom>
+          <a:noFill/>
+        </p:spPr>
+        <p:txBody>
+          <a:bodyPr wrap="square" anchor="t" lIns="45720" rIns="45720" tIns="27432" bIns="27432">
+            <a:normAutofit/>
+          </a:bodyPr>
+          <a:lstStyle/>
+          <a:p>
+            <a:pPr algn="l"/>
+            <a:r>
+              <a:rPr sz="850" b="1">
+                <a:solidFill>
+                  <a:srgbClr val="B7860B"/>
+                </a:solidFill>
+                <a:latin typeface="Inter"/>
+              </a:rPr>
+              <a:t>LA REGLA DEL RETO</a:t>
+            </a:r>
+          </a:p>
+          <a:p>
+            <a:pPr algn="l"/>
+            <a:r>
+              <a:rPr sz="1100">
+                <a:solidFill>
+                  <a:srgbClr val="20242E"/>
+                </a:solidFill>
+                <a:latin typeface="Inter"/>
+              </a:rPr>
+              <a:t>Precies twee delen. Het eerste helemaal in het imperfecto en zonder één gebeurtenis; het tweede begint met «un día» en staat in het indefinido. Wie mengt, begint opnieuw.</a:t>
+            </a:r>
+          </a:p>
+        </p:txBody>
+      </p:sp>
+      <p:sp>
+        <p:nvSpPr>
+          <p:cNvPr id="11" name="Tarjeta 0"/>
+          <p:cNvSpPr/>
+          <p:nvPr/>
+        </p:nvSpPr>
+        <p:spPr>
+          <a:xfrm>
+            <a:off x="457200" y="2670048"/>
+            <a:ext cx="2708910" cy="1170432"/>
+          </a:xfrm>
+          <a:prstGeom prst="roundRect">
+            <a:avLst>
+              <a:gd name="adj" fmla="val 6000"/>
+            </a:avLst>
+          </a:prstGeom>
+          <a:solidFill>
+            <a:srgbClr val="FFFFFF"/>
+          </a:solidFill>
+          <a:ln w="12700">
+            <a:solidFill>
+              <a:srgbClr val="E4E3DE"/>
+            </a:solidFill>
+          </a:ln>
+          <a:effectLst/>
+        </p:spPr>
+        <p:style>
+          <a:lnRef idx="1">
+            <a:schemeClr val="accent1"/>
+          </a:lnRef>
+          <a:fillRef idx="3">
+            <a:schemeClr val="accent1"/>
+          </a:fillRef>
+          <a:effectRef idx="2">
+            <a:schemeClr val="accent1"/>
+          </a:effectRef>
+          <a:fontRef idx="minor">
+            <a:schemeClr val="lt1"/>
+          </a:fontRef>
+        </p:style>
+        <p:txBody>
+          <a:bodyPr rtlCol="0" anchor="ctr"/>
+          <a:lstStyle/>
+          <a:p/>
+        </p:txBody>
+      </p:sp>
+      <p:sp>
+        <p:nvSpPr>
+          <p:cNvPr id="12" name="TarjetaTxt 0"/>
+          <p:cNvSpPr txBox="1"/>
+          <p:nvPr/>
+        </p:nvSpPr>
+        <p:spPr>
+          <a:xfrm>
+            <a:off x="548640" y="2724912"/>
+            <a:ext cx="2526030" cy="1060704"/>
+          </a:xfrm>
+          <a:prstGeom prst="rect">
+            <a:avLst/>
+          </a:prstGeom>
+          <a:noFill/>
+        </p:spPr>
+        <p:txBody>
+          <a:bodyPr wrap="square" anchor="t" lIns="45720" rIns="45720" tIns="27432" bIns="27432">
+            <a:normAutofit/>
+          </a:bodyPr>
+          <a:lstStyle/>
+          <a:p>
+            <a:pPr algn="l"/>
+            <a:r>
+              <a:rPr sz="1100" b="1">
+                <a:solidFill>
+                  <a:srgbClr val="5B3E83"/>
+                </a:solidFill>
+                <a:latin typeface="Bricolage Grotesque"/>
+              </a:rPr>
+              <a:t>Objetos</a:t>
+            </a:r>
+          </a:p>
+          <a:p>
+            <a:pPr algn="l"/>
+            <a:r>
+              <a:rPr sz="1000">
+                <a:solidFill>
+                  <a:srgbClr val="20242E"/>
+                </a:solidFill>
+                <a:latin typeface="Inter"/>
+              </a:rPr>
+              <a:t>un peluche · una bici · una consola</a:t>
+            </a:r>
+          </a:p>
+        </p:txBody>
+      </p:sp>
+      <p:sp>
+        <p:nvSpPr>
+          <p:cNvPr id="13" name="Tarjeta 1"/>
+          <p:cNvSpPr/>
+          <p:nvPr/>
+        </p:nvSpPr>
+        <p:spPr>
+          <a:xfrm>
+            <a:off x="3312414" y="2670048"/>
+            <a:ext cx="2708910" cy="1170432"/>
+          </a:xfrm>
+          <a:prstGeom prst="roundRect">
+            <a:avLst>
+              <a:gd name="adj" fmla="val 6000"/>
+            </a:avLst>
+          </a:prstGeom>
+          <a:solidFill>
+            <a:srgbClr val="FFFFFF"/>
+          </a:solidFill>
+          <a:ln w="12700">
+            <a:solidFill>
+              <a:srgbClr val="E4E3DE"/>
+            </a:solidFill>
+          </a:ln>
+          <a:effectLst/>
+        </p:spPr>
+        <p:style>
+          <a:lnRef idx="1">
+            <a:schemeClr val="accent1"/>
+          </a:lnRef>
+          <a:fillRef idx="3">
+            <a:schemeClr val="accent1"/>
+          </a:fillRef>
+          <a:effectRef idx="2">
+            <a:schemeClr val="accent1"/>
+          </a:effectRef>
+          <a:fontRef idx="minor">
+            <a:schemeClr val="lt1"/>
+          </a:fontRef>
+        </p:style>
+        <p:txBody>
+          <a:bodyPr rtlCol="0" anchor="ctr"/>
+          <a:lstStyle/>
+          <a:p/>
+        </p:txBody>
+      </p:sp>
+      <p:sp>
+        <p:nvSpPr>
+          <p:cNvPr id="14" name="TarjetaTxt 1"/>
+          <p:cNvSpPr txBox="1"/>
+          <p:nvPr/>
+        </p:nvSpPr>
+        <p:spPr>
+          <a:xfrm>
+            <a:off x="3403854" y="2724912"/>
+            <a:ext cx="2526030" cy="1060704"/>
+          </a:xfrm>
+          <a:prstGeom prst="rect">
+            <a:avLst/>
+          </a:prstGeom>
+          <a:noFill/>
+        </p:spPr>
+        <p:txBody>
+          <a:bodyPr wrap="square" anchor="t" lIns="45720" rIns="45720" tIns="27432" bIns="27432">
+            <a:normAutofit/>
+          </a:bodyPr>
+          <a:lstStyle/>
+          <a:p>
+            <a:pPr algn="l"/>
+            <a:r>
+              <a:rPr sz="1100" b="1">
+                <a:solidFill>
+                  <a:srgbClr val="5B3E83"/>
+                </a:solidFill>
+                <a:latin typeface="Bricolage Grotesque"/>
+              </a:rPr>
+              <a:t>Objetos</a:t>
+            </a:r>
+          </a:p>
+          <a:p>
+            <a:pPr algn="l"/>
+            <a:r>
+              <a:rPr sz="1000">
+                <a:solidFill>
+                  <a:srgbClr val="20242E"/>
+                </a:solidFill>
+                <a:latin typeface="Inter"/>
+              </a:rPr>
+              <a:t>una pelota · una caja de piezas · un disfraz</a:t>
+            </a:r>
+          </a:p>
+        </p:txBody>
+      </p:sp>
+      <p:sp>
+        <p:nvSpPr>
+          <p:cNvPr id="15" name="Tarjeta 2"/>
+          <p:cNvSpPr/>
+          <p:nvPr/>
+        </p:nvSpPr>
+        <p:spPr>
+          <a:xfrm>
+            <a:off x="6167628" y="2670048"/>
+            <a:ext cx="2708910" cy="1170432"/>
+          </a:xfrm>
+          <a:prstGeom prst="roundRect">
+            <a:avLst>
+              <a:gd name="adj" fmla="val 6000"/>
+            </a:avLst>
+          </a:prstGeom>
+          <a:solidFill>
+            <a:srgbClr val="FFFFFF"/>
+          </a:solidFill>
+          <a:ln w="12700">
+            <a:solidFill>
+              <a:srgbClr val="E4E3DE"/>
+            </a:solidFill>
+          </a:ln>
+          <a:effectLst/>
+        </p:spPr>
+        <p:style>
+          <a:lnRef idx="1">
+            <a:schemeClr val="accent1"/>
+          </a:lnRef>
+          <a:fillRef idx="3">
+            <a:schemeClr val="accent1"/>
+          </a:fillRef>
+          <a:effectRef idx="2">
+            <a:schemeClr val="accent1"/>
+          </a:effectRef>
+          <a:fontRef idx="minor">
+            <a:schemeClr val="lt1"/>
+          </a:fontRef>
+        </p:style>
+        <p:txBody>
+          <a:bodyPr rtlCol="0" anchor="ctr"/>
+          <a:lstStyle/>
+          <a:p/>
+        </p:txBody>
+      </p:sp>
+      <p:sp>
+        <p:nvSpPr>
+          <p:cNvPr id="16" name="TarjetaTxt 2"/>
+          <p:cNvSpPr txBox="1"/>
+          <p:nvPr/>
+        </p:nvSpPr>
+        <p:spPr>
+          <a:xfrm>
+            <a:off x="6259068" y="2724912"/>
+            <a:ext cx="2526030" cy="1060704"/>
+          </a:xfrm>
+          <a:prstGeom prst="rect">
+            <a:avLst/>
+          </a:prstGeom>
+          <a:noFill/>
+        </p:spPr>
+        <p:txBody>
+          <a:bodyPr wrap="square" anchor="t" lIns="45720" rIns="45720" tIns="27432" bIns="27432">
+            <a:normAutofit/>
+          </a:bodyPr>
+          <a:lstStyle/>
+          <a:p>
+            <a:pPr algn="l"/>
+            <a:r>
+              <a:rPr sz="1100" b="1">
+                <a:solidFill>
+                  <a:srgbClr val="5B3E83"/>
+                </a:solidFill>
+                <a:latin typeface="Bricolage Grotesque"/>
+              </a:rPr>
+              <a:t>Objetos</a:t>
+            </a:r>
+          </a:p>
+          <a:p>
+            <a:pPr algn="l"/>
+            <a:r>
+              <a:rPr sz="1000">
+                <a:solidFill>
+                  <a:srgbClr val="20242E"/>
+                </a:solidFill>
+                <a:latin typeface="Inter"/>
+              </a:rPr>
+              <a:t>un cuaderno de dibujos · un juguete de un hermano mayor</a:t>
+            </a:r>
+          </a:p>
+        </p:txBody>
+      </p:sp>
+      <p:sp>
+        <p:nvSpPr>
+          <p:cNvPr id="17" name="Tarjeta 3"/>
+          <p:cNvSpPr/>
+          <p:nvPr/>
+        </p:nvSpPr>
+        <p:spPr>
+          <a:xfrm>
+            <a:off x="9022842" y="2670048"/>
+            <a:ext cx="2708910" cy="1170432"/>
+          </a:xfrm>
+          <a:prstGeom prst="roundRect">
+            <a:avLst>
+              <a:gd name="adj" fmla="val 6000"/>
+            </a:avLst>
+          </a:prstGeom>
+          <a:solidFill>
+            <a:srgbClr val="FFFFFF"/>
+          </a:solidFill>
+          <a:ln w="12700">
+            <a:solidFill>
+              <a:srgbClr val="E4E3DE"/>
+            </a:solidFill>
+          </a:ln>
+          <a:effectLst/>
+        </p:spPr>
+        <p:style>
+          <a:lnRef idx="1">
+            <a:schemeClr val="accent1"/>
+          </a:lnRef>
+          <a:fillRef idx="3">
+            <a:schemeClr val="accent1"/>
+          </a:fillRef>
+          <a:effectRef idx="2">
+            <a:schemeClr val="accent1"/>
+          </a:effectRef>
+          <a:fontRef idx="minor">
+            <a:schemeClr val="lt1"/>
+          </a:fontRef>
+        </p:style>
+        <p:txBody>
+          <a:bodyPr rtlCol="0" anchor="ctr"/>
+          <a:lstStyle/>
+          <a:p/>
+        </p:txBody>
+      </p:sp>
+      <p:sp>
+        <p:nvSpPr>
+          <p:cNvPr id="18" name="TarjetaTxt 3"/>
+          <p:cNvSpPr txBox="1"/>
+          <p:nvPr/>
+        </p:nvSpPr>
+        <p:spPr>
+          <a:xfrm>
+            <a:off x="9114282" y="2724912"/>
+            <a:ext cx="2526030" cy="1060704"/>
+          </a:xfrm>
+          <a:prstGeom prst="rect">
+            <a:avLst/>
+          </a:prstGeom>
+          <a:noFill/>
+        </p:spPr>
+        <p:txBody>
+          <a:bodyPr wrap="square" anchor="t" lIns="45720" rIns="45720" tIns="27432" bIns="27432">
+            <a:normAutofit/>
+          </a:bodyPr>
+          <a:lstStyle/>
+          <a:p>
+            <a:pPr algn="l"/>
+            <a:r>
+              <a:rPr sz="1100" b="1">
+                <a:solidFill>
+                  <a:srgbClr val="5B3E83"/>
+                </a:solidFill>
+                <a:latin typeface="Bricolage Grotesque"/>
+              </a:rPr>
+              <a:t>Parte 1 · imperfecto</a:t>
+            </a:r>
+          </a:p>
+          <a:p>
+            <a:pPr algn="l"/>
+            <a:r>
+              <a:rPr sz="1000">
+                <a:solidFill>
+                  <a:srgbClr val="20242E"/>
+                </a:solidFill>
+                <a:latin typeface="Inter"/>
+              </a:rPr>
+              <a:t>Era …</a:t>
+            </a:r>
+          </a:p>
+        </p:txBody>
+      </p:sp>
+      <p:sp>
+        <p:nvSpPr>
+          <p:cNvPr id="19" name="Tarjeta 4"/>
+          <p:cNvSpPr/>
+          <p:nvPr/>
+        </p:nvSpPr>
+        <p:spPr>
+          <a:xfrm>
+            <a:off x="457200" y="3968496"/>
+            <a:ext cx="2708910" cy="1170432"/>
+          </a:xfrm>
+          <a:prstGeom prst="roundRect">
+            <a:avLst>
+              <a:gd name="adj" fmla="val 6000"/>
+            </a:avLst>
+          </a:prstGeom>
+          <a:solidFill>
+            <a:srgbClr val="FFFFFF"/>
+          </a:solidFill>
+          <a:ln w="12700">
+            <a:solidFill>
+              <a:srgbClr val="E4E3DE"/>
+            </a:solidFill>
+          </a:ln>
+          <a:effectLst/>
+        </p:spPr>
+        <p:style>
+          <a:lnRef idx="1">
+            <a:schemeClr val="accent1"/>
+          </a:lnRef>
+          <a:fillRef idx="3">
+            <a:schemeClr val="accent1"/>
+          </a:fillRef>
+          <a:effectRef idx="2">
+            <a:schemeClr val="accent1"/>
+          </a:effectRef>
+          <a:fontRef idx="minor">
+            <a:schemeClr val="lt1"/>
+          </a:fontRef>
+        </p:style>
+        <p:txBody>
+          <a:bodyPr rtlCol="0" anchor="ctr"/>
+          <a:lstStyle/>
+          <a:p/>
+        </p:txBody>
+      </p:sp>
+      <p:sp>
+        <p:nvSpPr>
+          <p:cNvPr id="20" name="TarjetaTxt 4"/>
+          <p:cNvSpPr txBox="1"/>
+          <p:nvPr/>
+        </p:nvSpPr>
+        <p:spPr>
+          <a:xfrm>
+            <a:off x="548640" y="4023360"/>
+            <a:ext cx="2526030" cy="1060704"/>
+          </a:xfrm>
+          <a:prstGeom prst="rect">
+            <a:avLst/>
+          </a:prstGeom>
+          <a:noFill/>
+        </p:spPr>
+        <p:txBody>
+          <a:bodyPr wrap="square" anchor="t" lIns="45720" rIns="45720" tIns="27432" bIns="27432">
+            <a:normAutofit/>
+          </a:bodyPr>
+          <a:lstStyle/>
+          <a:p>
+            <a:pPr algn="l"/>
+            <a:r>
+              <a:rPr sz="1100" b="1">
+                <a:solidFill>
+                  <a:srgbClr val="5B3E83"/>
+                </a:solidFill>
+                <a:latin typeface="Bricolage Grotesque"/>
+              </a:rPr>
+              <a:t>Parte 1 · imperfecto</a:t>
+            </a:r>
+          </a:p>
+          <a:p>
+            <a:pPr algn="l"/>
+            <a:r>
+              <a:rPr sz="1000">
+                <a:solidFill>
+                  <a:srgbClr val="20242E"/>
+                </a:solidFill>
+                <a:latin typeface="Inter"/>
+              </a:rPr>
+              <a:t>Estaba siempre …</a:t>
+            </a:r>
+          </a:p>
+        </p:txBody>
+      </p:sp>
+      <p:sp>
+        <p:nvSpPr>
+          <p:cNvPr id="21" name="Tarjeta 5"/>
+          <p:cNvSpPr/>
+          <p:nvPr/>
+        </p:nvSpPr>
+        <p:spPr>
+          <a:xfrm>
+            <a:off x="3312414" y="3968496"/>
+            <a:ext cx="2708910" cy="1170432"/>
+          </a:xfrm>
+          <a:prstGeom prst="roundRect">
+            <a:avLst>
+              <a:gd name="adj" fmla="val 6000"/>
+            </a:avLst>
+          </a:prstGeom>
+          <a:solidFill>
+            <a:srgbClr val="FFFFFF"/>
+          </a:solidFill>
+          <a:ln w="12700">
+            <a:solidFill>
+              <a:srgbClr val="E4E3DE"/>
+            </a:solidFill>
+          </a:ln>
+          <a:effectLst/>
+        </p:spPr>
+        <p:style>
+          <a:lnRef idx="1">
+            <a:schemeClr val="accent1"/>
+          </a:lnRef>
+          <a:fillRef idx="3">
+            <a:schemeClr val="accent1"/>
+          </a:fillRef>
+          <a:effectRef idx="2">
+            <a:schemeClr val="accent1"/>
+          </a:effectRef>
+          <a:fontRef idx="minor">
+            <a:schemeClr val="lt1"/>
+          </a:fontRef>
+        </p:style>
+        <p:txBody>
+          <a:bodyPr rtlCol="0" anchor="ctr"/>
+          <a:lstStyle/>
+          <a:p/>
+        </p:txBody>
+      </p:sp>
+      <p:sp>
+        <p:nvSpPr>
+          <p:cNvPr id="22" name="TarjetaTxt 5"/>
+          <p:cNvSpPr txBox="1"/>
+          <p:nvPr/>
+        </p:nvSpPr>
+        <p:spPr>
+          <a:xfrm>
+            <a:off x="3403854" y="4023360"/>
+            <a:ext cx="2526030" cy="1060704"/>
+          </a:xfrm>
+          <a:prstGeom prst="rect">
+            <a:avLst/>
+          </a:prstGeom>
+          <a:noFill/>
+        </p:spPr>
+        <p:txBody>
+          <a:bodyPr wrap="square" anchor="t" lIns="45720" rIns="45720" tIns="27432" bIns="27432">
+            <a:normAutofit/>
+          </a:bodyPr>
+          <a:lstStyle/>
+          <a:p>
+            <a:pPr algn="l"/>
+            <a:r>
+              <a:rPr sz="1100" b="1">
+                <a:solidFill>
+                  <a:srgbClr val="5B3E83"/>
+                </a:solidFill>
+                <a:latin typeface="Bricolage Grotesque"/>
+              </a:rPr>
+              <a:t>Parte 1 · imperfecto</a:t>
+            </a:r>
+          </a:p>
+          <a:p>
+            <a:pPr algn="l"/>
+            <a:r>
+              <a:rPr sz="1000">
+                <a:solidFill>
+                  <a:srgbClr val="20242E"/>
+                </a:solidFill>
+                <a:latin typeface="Inter"/>
+              </a:rPr>
+              <a:t>Lo/la usaba para …</a:t>
+            </a:r>
+          </a:p>
+        </p:txBody>
+      </p:sp>
+      <p:sp>
+        <p:nvSpPr>
+          <p:cNvPr id="23" name="Tarjeta 6"/>
+          <p:cNvSpPr/>
+          <p:nvPr/>
+        </p:nvSpPr>
+        <p:spPr>
+          <a:xfrm>
+            <a:off x="6167628" y="3968496"/>
+            <a:ext cx="2708910" cy="1170432"/>
+          </a:xfrm>
+          <a:prstGeom prst="roundRect">
+            <a:avLst>
+              <a:gd name="adj" fmla="val 6000"/>
+            </a:avLst>
+          </a:prstGeom>
+          <a:solidFill>
+            <a:srgbClr val="FFFFFF"/>
+          </a:solidFill>
+          <a:ln w="12700">
+            <a:solidFill>
+              <a:srgbClr val="E4E3DE"/>
+            </a:solidFill>
+          </a:ln>
+          <a:effectLst/>
+        </p:spPr>
+        <p:style>
+          <a:lnRef idx="1">
+            <a:schemeClr val="accent1"/>
+          </a:lnRef>
+          <a:fillRef idx="3">
+            <a:schemeClr val="accent1"/>
+          </a:fillRef>
+          <a:effectRef idx="2">
+            <a:schemeClr val="accent1"/>
+          </a:effectRef>
+          <a:fontRef idx="minor">
+            <a:schemeClr val="lt1"/>
+          </a:fontRef>
+        </p:style>
+        <p:txBody>
+          <a:bodyPr rtlCol="0" anchor="ctr"/>
+          <a:lstStyle/>
+          <a:p/>
+        </p:txBody>
+      </p:sp>
+      <p:sp>
+        <p:nvSpPr>
+          <p:cNvPr id="24" name="TarjetaTxt 6"/>
+          <p:cNvSpPr txBox="1"/>
+          <p:nvPr/>
+        </p:nvSpPr>
+        <p:spPr>
+          <a:xfrm>
+            <a:off x="6259068" y="4023360"/>
+            <a:ext cx="2526030" cy="1060704"/>
+          </a:xfrm>
+          <a:prstGeom prst="rect">
+            <a:avLst/>
+          </a:prstGeom>
+          <a:noFill/>
+        </p:spPr>
+        <p:txBody>
+          <a:bodyPr wrap="square" anchor="t" lIns="45720" rIns="45720" tIns="27432" bIns="27432">
+            <a:normAutofit/>
+          </a:bodyPr>
+          <a:lstStyle/>
+          <a:p>
+            <a:pPr algn="l"/>
+            <a:r>
+              <a:rPr sz="1100" b="1">
+                <a:solidFill>
+                  <a:srgbClr val="5B3E83"/>
+                </a:solidFill>
+                <a:latin typeface="Bricolage Grotesque"/>
+              </a:rPr>
+              <a:t>Parte 1 · imperfecto</a:t>
+            </a:r>
+          </a:p>
+          <a:p>
+            <a:pPr algn="l"/>
+            <a:r>
+              <a:rPr sz="1000">
+                <a:solidFill>
+                  <a:srgbClr val="20242E"/>
+                </a:solidFill>
+                <a:latin typeface="Inter"/>
+              </a:rPr>
+              <a:t>Cuando … , siempre …</a:t>
+            </a:r>
+          </a:p>
+        </p:txBody>
+      </p:sp>
+      <p:sp>
+        <p:nvSpPr>
+          <p:cNvPr id="25" name="Tarjeta 7"/>
+          <p:cNvSpPr/>
+          <p:nvPr/>
+        </p:nvSpPr>
+        <p:spPr>
+          <a:xfrm>
+            <a:off x="9022842" y="3968496"/>
+            <a:ext cx="2708910" cy="1170432"/>
+          </a:xfrm>
+          <a:prstGeom prst="roundRect">
+            <a:avLst>
+              <a:gd name="adj" fmla="val 6000"/>
+            </a:avLst>
+          </a:prstGeom>
+          <a:solidFill>
+            <a:srgbClr val="FFFFFF"/>
+          </a:solidFill>
+          <a:ln w="12700">
+            <a:solidFill>
+              <a:srgbClr val="E4E3DE"/>
+            </a:solidFill>
+          </a:ln>
+          <a:effectLst/>
+        </p:spPr>
+        <p:style>
+          <a:lnRef idx="1">
+            <a:schemeClr val="accent1"/>
+          </a:lnRef>
+          <a:fillRef idx="3">
+            <a:schemeClr val="accent1"/>
+          </a:fillRef>
+          <a:effectRef idx="2">
+            <a:schemeClr val="accent1"/>
+          </a:effectRef>
+          <a:fontRef idx="minor">
+            <a:schemeClr val="lt1"/>
+          </a:fontRef>
+        </p:style>
+        <p:txBody>
+          <a:bodyPr rtlCol="0" anchor="ctr"/>
+          <a:lstStyle/>
+          <a:p/>
+        </p:txBody>
+      </p:sp>
+      <p:sp>
+        <p:nvSpPr>
+          <p:cNvPr id="26" name="TarjetaTxt 7"/>
+          <p:cNvSpPr txBox="1"/>
+          <p:nvPr/>
+        </p:nvSpPr>
+        <p:spPr>
+          <a:xfrm>
+            <a:off x="9114282" y="4023360"/>
+            <a:ext cx="2526030" cy="1060704"/>
+          </a:xfrm>
+          <a:prstGeom prst="rect">
+            <a:avLst/>
+          </a:prstGeom>
+          <a:noFill/>
+        </p:spPr>
+        <p:txBody>
+          <a:bodyPr wrap="square" anchor="t" lIns="45720" rIns="45720" tIns="27432" bIns="27432">
+            <a:normAutofit/>
+          </a:bodyPr>
+          <a:lstStyle/>
+          <a:p>
+            <a:pPr algn="l"/>
+            <a:r>
+              <a:rPr sz="1100" b="1">
+                <a:solidFill>
+                  <a:srgbClr val="5B3E83"/>
+                </a:solidFill>
+                <a:latin typeface="Bricolage Grotesque"/>
+              </a:rPr>
+              <a:t>Parte 1 · imperfecto</a:t>
+            </a:r>
+          </a:p>
+          <a:p>
+            <a:pPr algn="l"/>
+            <a:r>
+              <a:rPr sz="1000">
+                <a:solidFill>
+                  <a:srgbClr val="20242E"/>
+                </a:solidFill>
+                <a:latin typeface="Inter"/>
+              </a:rPr>
+              <a:t>No era …, pero …</a:t>
+            </a:r>
+          </a:p>
+        </p:txBody>
+      </p:sp>
+      <p:sp>
+        <p:nvSpPr>
+          <p:cNvPr id="27" name="Tarjeta 8"/>
+          <p:cNvSpPr/>
+          <p:nvPr/>
+        </p:nvSpPr>
+        <p:spPr>
+          <a:xfrm>
+            <a:off x="457200" y="5266944"/>
+            <a:ext cx="2708910" cy="1170432"/>
+          </a:xfrm>
+          <a:prstGeom prst="roundRect">
+            <a:avLst>
+              <a:gd name="adj" fmla="val 6000"/>
+            </a:avLst>
+          </a:prstGeom>
+          <a:solidFill>
+            <a:srgbClr val="FFFFFF"/>
+          </a:solidFill>
+          <a:ln w="12700">
+            <a:solidFill>
+              <a:srgbClr val="E4E3DE"/>
+            </a:solidFill>
+          </a:ln>
+          <a:effectLst/>
+        </p:spPr>
+        <p:style>
+          <a:lnRef idx="1">
+            <a:schemeClr val="accent1"/>
+          </a:lnRef>
+          <a:fillRef idx="3">
+            <a:schemeClr val="accent1"/>
+          </a:fillRef>
+          <a:effectRef idx="2">
+            <a:schemeClr val="accent1"/>
+          </a:effectRef>
+          <a:fontRef idx="minor">
+            <a:schemeClr val="lt1"/>
+          </a:fontRef>
+        </p:style>
+        <p:txBody>
+          <a:bodyPr rtlCol="0" anchor="ctr"/>
+          <a:lstStyle/>
+          <a:p/>
+        </p:txBody>
+      </p:sp>
+      <p:sp>
+        <p:nvSpPr>
+          <p:cNvPr id="28" name="TarjetaTxt 8"/>
+          <p:cNvSpPr txBox="1"/>
+          <p:nvPr/>
+        </p:nvSpPr>
+        <p:spPr>
+          <a:xfrm>
+            <a:off x="548640" y="5321808"/>
+            <a:ext cx="2526030" cy="1060704"/>
+          </a:xfrm>
+          <a:prstGeom prst="rect">
+            <a:avLst/>
+          </a:prstGeom>
+          <a:noFill/>
+        </p:spPr>
+        <p:txBody>
+          <a:bodyPr wrap="square" anchor="t" lIns="45720" rIns="45720" tIns="27432" bIns="27432">
+            <a:normAutofit/>
+          </a:bodyPr>
+          <a:lstStyle/>
+          <a:p>
+            <a:pPr algn="l"/>
+            <a:r>
+              <a:rPr sz="1100" b="1">
+                <a:solidFill>
+                  <a:srgbClr val="5B3E83"/>
+                </a:solidFill>
+                <a:latin typeface="Bricolage Grotesque"/>
+              </a:rPr>
+              <a:t>Parte 2 · indefinido</a:t>
+            </a:r>
+          </a:p>
+          <a:p>
+            <a:pPr algn="l"/>
+            <a:r>
+              <a:rPr sz="1000">
+                <a:solidFill>
+                  <a:srgbClr val="20242E"/>
+                </a:solidFill>
+                <a:latin typeface="Inter"/>
+              </a:rPr>
+              <a:t>Un día …</a:t>
+            </a:r>
+          </a:p>
+        </p:txBody>
+      </p:sp>
+      <p:sp>
+        <p:nvSpPr>
+          <p:cNvPr id="29" name="Tarjeta 9"/>
+          <p:cNvSpPr/>
+          <p:nvPr/>
+        </p:nvSpPr>
+        <p:spPr>
+          <a:xfrm>
+            <a:off x="3312414" y="5266944"/>
+            <a:ext cx="2708910" cy="1170432"/>
+          </a:xfrm>
+          <a:prstGeom prst="roundRect">
+            <a:avLst>
+              <a:gd name="adj" fmla="val 6000"/>
+            </a:avLst>
+          </a:prstGeom>
+          <a:solidFill>
+            <a:srgbClr val="FFFFFF"/>
+          </a:solidFill>
+          <a:ln w="12700">
+            <a:solidFill>
+              <a:srgbClr val="E4E3DE"/>
+            </a:solidFill>
+          </a:ln>
+          <a:effectLst/>
+        </p:spPr>
+        <p:style>
+          <a:lnRef idx="1">
+            <a:schemeClr val="accent1"/>
+          </a:lnRef>
+          <a:fillRef idx="3">
+            <a:schemeClr val="accent1"/>
+          </a:fillRef>
+          <a:effectRef idx="2">
+            <a:schemeClr val="accent1"/>
+          </a:effectRef>
+          <a:fontRef idx="minor">
+            <a:schemeClr val="lt1"/>
+          </a:fontRef>
+        </p:style>
+        <p:txBody>
+          <a:bodyPr rtlCol="0" anchor="ctr"/>
+          <a:lstStyle/>
+          <a:p/>
+        </p:txBody>
+      </p:sp>
+      <p:sp>
+        <p:nvSpPr>
+          <p:cNvPr id="30" name="TarjetaTxt 9"/>
+          <p:cNvSpPr txBox="1"/>
+          <p:nvPr/>
+        </p:nvSpPr>
+        <p:spPr>
+          <a:xfrm>
+            <a:off x="3403854" y="5321808"/>
+            <a:ext cx="2526030" cy="1060704"/>
+          </a:xfrm>
+          <a:prstGeom prst="rect">
+            <a:avLst/>
+          </a:prstGeom>
+          <a:noFill/>
+        </p:spPr>
+        <p:txBody>
+          <a:bodyPr wrap="square" anchor="t" lIns="45720" rIns="45720" tIns="27432" bIns="27432">
+            <a:normAutofit/>
+          </a:bodyPr>
+          <a:lstStyle/>
+          <a:p>
+            <a:pPr algn="l"/>
+            <a:r>
+              <a:rPr sz="1100" b="1">
+                <a:solidFill>
+                  <a:srgbClr val="5B3E83"/>
+                </a:solidFill>
+                <a:latin typeface="Bricolage Grotesque"/>
+              </a:rPr>
+              <a:t>Parte 2 · indefinido</a:t>
+            </a:r>
+          </a:p>
+          <a:p>
+            <a:pPr algn="l"/>
+            <a:r>
+              <a:rPr sz="1000">
+                <a:solidFill>
+                  <a:srgbClr val="20242E"/>
+                </a:solidFill>
+                <a:latin typeface="Inter"/>
+              </a:rPr>
+              <a:t>Entonces …</a:t>
+            </a:r>
+          </a:p>
+        </p:txBody>
+      </p:sp>
+      <p:sp>
+        <p:nvSpPr>
+          <p:cNvPr id="31" name="Tarjeta 10"/>
+          <p:cNvSpPr/>
+          <p:nvPr/>
+        </p:nvSpPr>
+        <p:spPr>
+          <a:xfrm>
+            <a:off x="6167628" y="5266944"/>
+            <a:ext cx="2708910" cy="1170432"/>
+          </a:xfrm>
+          <a:prstGeom prst="roundRect">
+            <a:avLst>
+              <a:gd name="adj" fmla="val 6000"/>
+            </a:avLst>
+          </a:prstGeom>
+          <a:solidFill>
+            <a:srgbClr val="FFFFFF"/>
+          </a:solidFill>
+          <a:ln w="12700">
+            <a:solidFill>
+              <a:srgbClr val="E4E3DE"/>
+            </a:solidFill>
+          </a:ln>
+          <a:effectLst/>
+        </p:spPr>
+        <p:style>
+          <a:lnRef idx="1">
+            <a:schemeClr val="accent1"/>
+          </a:lnRef>
+          <a:fillRef idx="3">
+            <a:schemeClr val="accent1"/>
+          </a:fillRef>
+          <a:effectRef idx="2">
+            <a:schemeClr val="accent1"/>
+          </a:effectRef>
+          <a:fontRef idx="minor">
+            <a:schemeClr val="lt1"/>
+          </a:fontRef>
+        </p:style>
+        <p:txBody>
+          <a:bodyPr rtlCol="0" anchor="ctr"/>
+          <a:lstStyle/>
+          <a:p/>
+        </p:txBody>
+      </p:sp>
+      <p:sp>
+        <p:nvSpPr>
+          <p:cNvPr id="32" name="TarjetaTxt 10"/>
+          <p:cNvSpPr txBox="1"/>
+          <p:nvPr/>
+        </p:nvSpPr>
+        <p:spPr>
+          <a:xfrm>
+            <a:off x="6259068" y="5321808"/>
+            <a:ext cx="2526030" cy="1060704"/>
+          </a:xfrm>
+          <a:prstGeom prst="rect">
+            <a:avLst/>
+          </a:prstGeom>
+          <a:noFill/>
+        </p:spPr>
+        <p:txBody>
+          <a:bodyPr wrap="square" anchor="t" lIns="45720" rIns="45720" tIns="27432" bIns="27432">
+            <a:normAutofit/>
+          </a:bodyPr>
+          <a:lstStyle/>
+          <a:p>
+            <a:pPr algn="l"/>
+            <a:r>
+              <a:rPr sz="1100" b="1">
+                <a:solidFill>
+                  <a:srgbClr val="5B3E83"/>
+                </a:solidFill>
+                <a:latin typeface="Bricolage Grotesque"/>
+              </a:rPr>
+              <a:t>Parte 2 · indefinido</a:t>
+            </a:r>
+          </a:p>
+          <a:p>
+            <a:pPr algn="l"/>
+            <a:r>
+              <a:rPr sz="1000">
+                <a:solidFill>
+                  <a:srgbClr val="20242E"/>
+                </a:solidFill>
+                <a:latin typeface="Inter"/>
+              </a:rPr>
+              <a:t>Y desde ese día …</a:t>
+            </a:r>
+          </a:p>
+        </p:txBody>
+      </p:sp>
+      <p:sp>
+        <p:nvSpPr>
+          <p:cNvPr id="33" name="Tarjeta 11"/>
+          <p:cNvSpPr/>
+          <p:nvPr/>
+        </p:nvSpPr>
+        <p:spPr>
+          <a:xfrm>
+            <a:off x="9022842" y="5266944"/>
+            <a:ext cx="2708910" cy="1170432"/>
+          </a:xfrm>
+          <a:prstGeom prst="roundRect">
+            <a:avLst>
+              <a:gd name="adj" fmla="val 6000"/>
+            </a:avLst>
+          </a:prstGeom>
+          <a:solidFill>
+            <a:srgbClr val="FFFFFF"/>
+          </a:solidFill>
+          <a:ln w="12700">
+            <a:solidFill>
+              <a:srgbClr val="E4E3DE"/>
+            </a:solidFill>
+          </a:ln>
+          <a:effectLst/>
+        </p:spPr>
+        <p:style>
+          <a:lnRef idx="1">
+            <a:schemeClr val="accent1"/>
+          </a:lnRef>
+          <a:fillRef idx="3">
+            <a:schemeClr val="accent1"/>
+          </a:fillRef>
+          <a:effectRef idx="2">
+            <a:schemeClr val="accent1"/>
+          </a:effectRef>
+          <a:fontRef idx="minor">
+            <a:schemeClr val="lt1"/>
+          </a:fontRef>
+        </p:style>
+        <p:txBody>
+          <a:bodyPr rtlCol="0" anchor="ctr"/>
+          <a:lstStyle/>
+          <a:p/>
+        </p:txBody>
+      </p:sp>
+      <p:sp>
+        <p:nvSpPr>
+          <p:cNvPr id="34" name="TarjetaTxt 11"/>
+          <p:cNvSpPr txBox="1"/>
+          <p:nvPr/>
+        </p:nvSpPr>
+        <p:spPr>
+          <a:xfrm>
+            <a:off x="9114282" y="5321808"/>
+            <a:ext cx="2526030" cy="1060704"/>
+          </a:xfrm>
+          <a:prstGeom prst="rect">
+            <a:avLst/>
+          </a:prstGeom>
+          <a:noFill/>
+        </p:spPr>
+        <p:txBody>
+          <a:bodyPr wrap="square" anchor="t" lIns="45720" rIns="45720" tIns="27432" bIns="27432">
+            <a:normAutofit/>
+          </a:bodyPr>
+          <a:lstStyle/>
+          <a:p>
+            <a:pPr algn="l"/>
+            <a:r>
+              <a:rPr sz="1100" b="1">
+                <a:solidFill>
+                  <a:srgbClr val="5B3E83"/>
+                </a:solidFill>
+                <a:latin typeface="Bricolage Grotesque"/>
+              </a:rPr>
+              <a:t>Aviso</a:t>
+            </a:r>
+          </a:p>
+          <a:p>
+            <a:pPr algn="l"/>
+            <a:r>
+              <a:rPr sz="1000">
+                <a:solidFill>
+                  <a:srgbClr val="20242E"/>
+                </a:solidFill>
+                <a:latin typeface="Inter"/>
+              </a:rPr>
+              <a:t>No hace falta que sea triste ni especial. Un juguete normal vale igual.</a:t>
+            </a:r>
+          </a:p>
+        </p:txBody>
+      </p:sp>
+    </p:spTree>
+  </p:cSld>
+  <p:clrMapOvr>
+    <a:masterClrMapping/>
+  </p:clrMapOvr>
+</p:sld>
+</file>
+
+<file path=ppt/slides/slide23.xml><?xml version="1.0" encoding="utf-8"?>
+<p:sld xmlns:a="http://schemas.openxmlformats.org/drawingml/2006/main" xmlns:p="http://schemas.openxmlformats.org/presentationml/2006/main" xmlns:r="http://schemas.openxmlformats.org/officeDocument/2006/relationships">
+  <p:cSld>
+    <p:spTree>
+      <p:nvGrpSpPr>
+        <p:cNvPr id="1" name=""/>
+        <p:cNvGrpSpPr/>
+        <p:nvPr/>
+      </p:nvGrpSpPr>
+      <p:grpSpPr/>
+      <p:sp>
+        <p:nvSpPr>
+          <p:cNvPr id="2" name="Fondo"/>
+          <p:cNvSpPr/>
+          <p:nvPr/>
+        </p:nvSpPr>
+        <p:spPr>
+          <a:xfrm>
+            <a:off x="0" y="0"/>
+            <a:ext cx="12191695" cy="6858000"/>
+          </a:xfrm>
+          <a:prstGeom prst="rect">
+            <a:avLst/>
+          </a:prstGeom>
+          <a:solidFill>
+            <a:srgbClr val="FCFBF8"/>
+          </a:solidFill>
+          <a:ln>
+            <a:noFill/>
+          </a:ln>
+          <a:effectLst/>
+        </p:spPr>
+        <p:style>
+          <a:lnRef idx="1">
+            <a:schemeClr val="accent1"/>
+          </a:lnRef>
+          <a:fillRef idx="3">
+            <a:schemeClr val="accent1"/>
+          </a:fillRef>
+          <a:effectRef idx="2">
+            <a:schemeClr val="accent1"/>
+          </a:effectRef>
+          <a:fontRef idx="minor">
+            <a:schemeClr val="lt1"/>
+          </a:fontRef>
+        </p:style>
+        <p:txBody>
+          <a:bodyPr rtlCol="0" anchor="ctr"/>
+          <a:lstStyle/>
+          <a:p/>
+        </p:txBody>
+      </p:sp>
+      <p:sp>
+        <p:nvSpPr>
+          <p:cNvPr id="3" name="Cabecera"/>
+          <p:cNvSpPr/>
+          <p:nvPr/>
+        </p:nvSpPr>
+        <p:spPr>
+          <a:xfrm>
+            <a:off x="0" y="0"/>
+            <a:ext cx="12191695" cy="1078992"/>
+          </a:xfrm>
+          <a:prstGeom prst="rect">
+            <a:avLst/>
+          </a:prstGeom>
+          <a:solidFill>
+            <a:srgbClr val="7C56A9"/>
+          </a:solidFill>
+          <a:ln>
+            <a:noFill/>
+          </a:ln>
+          <a:effectLst/>
+        </p:spPr>
+        <p:style>
+          <a:lnRef idx="1">
+            <a:schemeClr val="accent1"/>
+          </a:lnRef>
+          <a:fillRef idx="3">
+            <a:schemeClr val="accent1"/>
+          </a:fillRef>
+          <a:effectRef idx="2">
+            <a:schemeClr val="accent1"/>
+          </a:effectRef>
+          <a:fontRef idx="minor">
+            <a:schemeClr val="lt1"/>
+          </a:fontRef>
+        </p:style>
+        <p:txBody>
+          <a:bodyPr rtlCol="0" anchor="ctr"/>
+          <a:lstStyle/>
+          <a:p/>
+        </p:txBody>
+      </p:sp>
+      <p:sp>
+        <p:nvSpPr>
+          <p:cNvPr id="4" name="Chip"/>
+          <p:cNvSpPr/>
+          <p:nvPr/>
+        </p:nvSpPr>
+        <p:spPr>
+          <a:xfrm>
+            <a:off x="457200" y="182880"/>
+            <a:ext cx="3017520" cy="292608"/>
+          </a:xfrm>
+          <a:prstGeom prst="roundRect">
+            <a:avLst>
+              <a:gd name="adj" fmla="val 50000"/>
+            </a:avLst>
+          </a:prstGeom>
+          <a:solidFill>
+            <a:srgbClr val="FFFFFF"/>
+          </a:solidFill>
+          <a:ln>
+            <a:noFill/>
+          </a:ln>
+          <a:effectLst/>
+        </p:spPr>
+        <p:style>
+          <a:lnRef idx="1">
+            <a:schemeClr val="accent1"/>
+          </a:lnRef>
+          <a:fillRef idx="3">
+            <a:schemeClr val="accent1"/>
+          </a:fillRef>
+          <a:effectRef idx="2">
+            <a:schemeClr val="accent1"/>
+          </a:effectRef>
+          <a:fontRef idx="minor">
+            <a:schemeClr val="lt1"/>
+          </a:fontRef>
+        </p:style>
+        <p:txBody>
+          <a:bodyPr rtlCol="0" anchor="ctr"/>
+          <a:lstStyle/>
+          <a:p/>
+        </p:txBody>
+      </p:sp>
+      <p:sp>
+        <p:nvSpPr>
+          <p:cNvPr id="5" name="ChipTxt"/>
+          <p:cNvSpPr txBox="1"/>
+          <p:nvPr/>
+        </p:nvSpPr>
+        <p:spPr>
+          <a:xfrm>
+            <a:off x="457200" y="173736"/>
+            <a:ext cx="3017520" cy="310896"/>
+          </a:xfrm>
+          <a:prstGeom prst="rect">
+            <a:avLst/>
+          </a:prstGeom>
+          <a:noFill/>
+        </p:spPr>
+        <p:txBody>
+          <a:bodyPr wrap="square" anchor="ctr" lIns="45720" rIns="45720" tIns="27432" bIns="27432">
+            <a:normAutofit/>
+          </a:bodyPr>
+          <a:lstStyle/>
+          <a:p>
+            <a:pPr algn="ctr"/>
+            <a:r>
+              <a:rPr sz="950" b="1">
+                <a:solidFill>
+                  <a:srgbClr val="5B3E83"/>
+                </a:solidFill>
+                <a:latin typeface="Inter"/>
+              </a:rPr>
+              <a:t>RETO 3 · ONDERZOEK &amp; DATA</a:t>
+            </a:r>
+          </a:p>
+        </p:txBody>
+      </p:sp>
+      <p:sp>
+        <p:nvSpPr>
+          <p:cNvPr id="6" name="Titulo"/>
+          <p:cNvSpPr txBox="1"/>
+          <p:nvPr/>
+        </p:nvSpPr>
+        <p:spPr>
+          <a:xfrm>
+            <a:off x="457200" y="502920"/>
+            <a:ext cx="8412480" cy="475488"/>
+          </a:xfrm>
+          <a:prstGeom prst="rect">
+            <a:avLst/>
+          </a:prstGeom>
+          <a:noFill/>
+        </p:spPr>
+        <p:txBody>
+          <a:bodyPr wrap="square" anchor="t" lIns="45720" rIns="45720" tIns="27432" bIns="27432">
+            <a:normAutofit/>
+          </a:bodyPr>
+          <a:lstStyle/>
+          <a:p>
+            <a:pPr algn="l"/>
+            <a:r>
+              <a:rPr sz="2700" b="1">
+                <a:solidFill>
+                  <a:srgbClr val="FFFFFF"/>
+                </a:solidFill>
+                <a:latin typeface="Bricolage Grotesque"/>
+              </a:rPr>
+              <a:t>Antes se podía</a:t>
+            </a:r>
+          </a:p>
+        </p:txBody>
+      </p:sp>
+      <p:sp>
+        <p:nvSpPr>
+          <p:cNvPr id="7" name="Badges"/>
+          <p:cNvSpPr txBox="1"/>
+          <p:nvPr/>
+        </p:nvSpPr>
+        <p:spPr>
+          <a:xfrm>
+            <a:off x="9052560" y="256032"/>
+            <a:ext cx="2651760" cy="640080"/>
+          </a:xfrm>
+          <a:prstGeom prst="rect">
+            <a:avLst/>
+          </a:prstGeom>
+          <a:noFill/>
+        </p:spPr>
+        <p:txBody>
+          <a:bodyPr wrap="square" anchor="t" lIns="45720" rIns="45720" tIns="27432" bIns="27432">
+            <a:normAutofit/>
+          </a:bodyPr>
+          <a:lstStyle/>
+          <a:p>
+            <a:pPr algn="r"/>
+            <a:r>
+              <a:rPr sz="1000">
+                <a:solidFill>
+                  <a:srgbClr val="EEE8F5"/>
+                </a:solidFill>
+                <a:latin typeface="Inter"/>
+              </a:rPr>
+              <a:t>👤 Solo</a:t>
+            </a:r>
+          </a:p>
+          <a:p>
+            <a:pPr algn="r"/>
+            <a:r>
+              <a:rPr sz="1000">
+                <a:solidFill>
+                  <a:srgbClr val="EEE8F5"/>
+                </a:solidFill>
+                <a:latin typeface="Inter"/>
+              </a:rPr>
+              <a:t>± 15 min · ★★★</a:t>
+            </a:r>
+          </a:p>
+        </p:txBody>
+      </p:sp>
+      <p:sp>
+        <p:nvSpPr>
+          <p:cNvPr id="8" name="Gancho"/>
+          <p:cNvSpPr txBox="1"/>
+          <p:nvPr/>
+        </p:nvSpPr>
+        <p:spPr>
+          <a:xfrm>
+            <a:off x="457200" y="1225296"/>
+            <a:ext cx="11274552" cy="566928"/>
+          </a:xfrm>
+          <a:prstGeom prst="rect">
+            <a:avLst/>
+          </a:prstGeom>
+          <a:noFill/>
+        </p:spPr>
+        <p:txBody>
+          <a:bodyPr wrap="square" anchor="t" lIns="45720" rIns="45720" tIns="27432" bIns="27432">
+            <a:normAutofit/>
+          </a:bodyPr>
+          <a:lstStyle/>
+          <a:p>
+            <a:pPr algn="l"/>
+            <a:r>
+              <a:rPr sz="1600" b="1">
+                <a:solidFill>
+                  <a:srgbClr val="5B3E83"/>
+                </a:solidFill>
+                <a:latin typeface="Bricolage Grotesque"/>
+              </a:rPr>
+              <a:t>Preguntad a un adulto qué se podía hacer antes y ya no. Y contadlo vosotros.</a:t>
+            </a:r>
+          </a:p>
+          <a:p>
+            <a:pPr algn="l"/>
+            <a:r>
+              <a:rPr sz="1100" i="1">
+                <a:solidFill>
+                  <a:srgbClr val="6A6E78"/>
+                </a:solidFill>
+                <a:latin typeface="Inter"/>
+              </a:rPr>
+              <a:t>Vraag een volwassene wat vroeger mocht en nu niet meer. En vertel het door.</a:t>
+            </a:r>
+          </a:p>
+        </p:txBody>
+      </p:sp>
+      <p:sp>
+        <p:nvSpPr>
+          <p:cNvPr id="9" name="ReglaCaja"/>
+          <p:cNvSpPr/>
+          <p:nvPr/>
+        </p:nvSpPr>
+        <p:spPr>
+          <a:xfrm>
+            <a:off x="457200" y="1847088"/>
+            <a:ext cx="11274552" cy="658368"/>
+          </a:xfrm>
+          <a:prstGeom prst="roundRect">
+            <a:avLst>
+              <a:gd name="adj" fmla="val 5000"/>
+            </a:avLst>
+          </a:prstGeom>
+          <a:solidFill>
+            <a:srgbClr val="FBF3D6"/>
+          </a:solidFill>
+          <a:ln>
+            <a:noFill/>
+          </a:ln>
+          <a:effectLst/>
+        </p:spPr>
+        <p:style>
+          <a:lnRef idx="1">
+            <a:schemeClr val="accent1"/>
+          </a:lnRef>
+          <a:fillRef idx="3">
+            <a:schemeClr val="accent1"/>
+          </a:fillRef>
+          <a:effectRef idx="2">
+            <a:schemeClr val="accent1"/>
+          </a:effectRef>
+          <a:fontRef idx="minor">
+            <a:schemeClr val="lt1"/>
+          </a:fontRef>
+        </p:style>
+        <p:txBody>
+          <a:bodyPr rtlCol="0" anchor="ctr"/>
+          <a:lstStyle/>
+          <a:p/>
+        </p:txBody>
+      </p:sp>
+      <p:sp>
+        <p:nvSpPr>
+          <p:cNvPr id="10" name="ReglaTxt"/>
+          <p:cNvSpPr txBox="1"/>
+          <p:nvPr/>
+        </p:nvSpPr>
+        <p:spPr>
+          <a:xfrm>
+            <a:off x="603504" y="1883664"/>
+            <a:ext cx="10972800" cy="585216"/>
+          </a:xfrm>
+          <a:prstGeom prst="rect">
+            <a:avLst/>
+          </a:prstGeom>
+          <a:noFill/>
+        </p:spPr>
+        <p:txBody>
+          <a:bodyPr wrap="square" anchor="t" lIns="45720" rIns="45720" tIns="27432" bIns="27432">
+            <a:normAutofit/>
+          </a:bodyPr>
+          <a:lstStyle/>
+          <a:p>
+            <a:pPr algn="l"/>
+            <a:r>
+              <a:rPr sz="850" b="1">
+                <a:solidFill>
+                  <a:srgbClr val="B7860B"/>
+                </a:solidFill>
+                <a:latin typeface="Inter"/>
+              </a:rPr>
+              <a:t>LA REGLA DEL RETO</a:t>
+            </a:r>
+          </a:p>
+          <a:p>
+            <a:pPr algn="l"/>
+            <a:r>
+              <a:rPr sz="1100">
+                <a:solidFill>
+                  <a:srgbClr val="20242E"/>
+                </a:solidFill>
+                <a:latin typeface="Inter"/>
+              </a:rPr>
+              <a:t>Je vertelt het na in de derde persoon — dus niet «yo podía», maar «mi tía podía». En elk antwoord krijgt een «ahora ya no»-zin ernaast, anders is het geen contrast.</a:t>
+            </a:r>
+          </a:p>
+        </p:txBody>
+      </p:sp>
+      <p:sp>
+        <p:nvSpPr>
+          <p:cNvPr id="11" name="Tarjeta 0"/>
+          <p:cNvSpPr/>
+          <p:nvPr/>
+        </p:nvSpPr>
+        <p:spPr>
+          <a:xfrm>
+            <a:off x="457200" y="2670048"/>
+            <a:ext cx="2708910" cy="1170432"/>
+          </a:xfrm>
+          <a:prstGeom prst="roundRect">
+            <a:avLst>
+              <a:gd name="adj" fmla="val 6000"/>
+            </a:avLst>
+          </a:prstGeom>
+          <a:solidFill>
+            <a:srgbClr val="FFFFFF"/>
+          </a:solidFill>
+          <a:ln w="12700">
+            <a:solidFill>
+              <a:srgbClr val="E4E3DE"/>
+            </a:solidFill>
+          </a:ln>
+          <a:effectLst/>
+        </p:spPr>
+        <p:style>
+          <a:lnRef idx="1">
+            <a:schemeClr val="accent1"/>
+          </a:lnRef>
+          <a:fillRef idx="3">
+            <a:schemeClr val="accent1"/>
+          </a:fillRef>
+          <a:effectRef idx="2">
+            <a:schemeClr val="accent1"/>
+          </a:effectRef>
+          <a:fontRef idx="minor">
+            <a:schemeClr val="lt1"/>
+          </a:fontRef>
+        </p:style>
+        <p:txBody>
+          <a:bodyPr rtlCol="0" anchor="ctr"/>
+          <a:lstStyle/>
+          <a:p/>
+        </p:txBody>
+      </p:sp>
+      <p:sp>
+        <p:nvSpPr>
+          <p:cNvPr id="12" name="TarjetaTxt 0"/>
+          <p:cNvSpPr txBox="1"/>
+          <p:nvPr/>
+        </p:nvSpPr>
+        <p:spPr>
+          <a:xfrm>
+            <a:off x="548640" y="2724912"/>
+            <a:ext cx="2526030" cy="1060704"/>
+          </a:xfrm>
+          <a:prstGeom prst="rect">
+            <a:avLst/>
+          </a:prstGeom>
+          <a:noFill/>
+        </p:spPr>
+        <p:txBody>
+          <a:bodyPr wrap="square" anchor="t" lIns="45720" rIns="45720" tIns="27432" bIns="27432">
+            <a:normAutofit/>
+          </a:bodyPr>
+          <a:lstStyle/>
+          <a:p>
+            <a:pPr algn="l"/>
+            <a:r>
+              <a:rPr sz="1100" b="1">
+                <a:solidFill>
+                  <a:srgbClr val="5B3E83"/>
+                </a:solidFill>
+                <a:latin typeface="Bricolage Grotesque"/>
+              </a:rPr>
+              <a:t>pregunta</a:t>
+            </a:r>
+          </a:p>
+          <a:p>
+            <a:pPr algn="l"/>
+            <a:r>
+              <a:rPr sz="1000">
+                <a:solidFill>
+                  <a:srgbClr val="20242E"/>
+                </a:solidFill>
+                <a:latin typeface="Inter"/>
+              </a:rPr>
+              <a:t>¿Se podía salir solo/-a a los diez años?</a:t>
+            </a:r>
+          </a:p>
+        </p:txBody>
+      </p:sp>
+      <p:sp>
+        <p:nvSpPr>
+          <p:cNvPr id="13" name="Tarjeta 1"/>
+          <p:cNvSpPr/>
+          <p:nvPr/>
+        </p:nvSpPr>
+        <p:spPr>
+          <a:xfrm>
+            <a:off x="3312414" y="2670048"/>
+            <a:ext cx="2708910" cy="1170432"/>
+          </a:xfrm>
+          <a:prstGeom prst="roundRect">
+            <a:avLst>
+              <a:gd name="adj" fmla="val 6000"/>
+            </a:avLst>
+          </a:prstGeom>
+          <a:solidFill>
+            <a:srgbClr val="FFFFFF"/>
+          </a:solidFill>
+          <a:ln w="12700">
+            <a:solidFill>
+              <a:srgbClr val="E4E3DE"/>
+            </a:solidFill>
+          </a:ln>
+          <a:effectLst/>
+        </p:spPr>
+        <p:style>
+          <a:lnRef idx="1">
+            <a:schemeClr val="accent1"/>
+          </a:lnRef>
+          <a:fillRef idx="3">
+            <a:schemeClr val="accent1"/>
+          </a:fillRef>
+          <a:effectRef idx="2">
+            <a:schemeClr val="accent1"/>
+          </a:effectRef>
+          <a:fontRef idx="minor">
+            <a:schemeClr val="lt1"/>
+          </a:fontRef>
+        </p:style>
+        <p:txBody>
+          <a:bodyPr rtlCol="0" anchor="ctr"/>
+          <a:lstStyle/>
+          <a:p/>
+        </p:txBody>
+      </p:sp>
+      <p:sp>
+        <p:nvSpPr>
+          <p:cNvPr id="14" name="TarjetaTxt 1"/>
+          <p:cNvSpPr txBox="1"/>
+          <p:nvPr/>
+        </p:nvSpPr>
+        <p:spPr>
+          <a:xfrm>
+            <a:off x="3403854" y="2724912"/>
+            <a:ext cx="2526030" cy="1060704"/>
+          </a:xfrm>
+          <a:prstGeom prst="rect">
+            <a:avLst/>
+          </a:prstGeom>
+          <a:noFill/>
+        </p:spPr>
+        <p:txBody>
+          <a:bodyPr wrap="square" anchor="t" lIns="45720" rIns="45720" tIns="27432" bIns="27432">
+            <a:normAutofit/>
+          </a:bodyPr>
+          <a:lstStyle/>
+          <a:p>
+            <a:pPr algn="l"/>
+            <a:r>
+              <a:rPr sz="1100" b="1">
+                <a:solidFill>
+                  <a:srgbClr val="5B3E83"/>
+                </a:solidFill>
+                <a:latin typeface="Bricolage Grotesque"/>
+              </a:rPr>
+              <a:t>pregunta</a:t>
+            </a:r>
+          </a:p>
+          <a:p>
+            <a:pPr algn="l"/>
+            <a:r>
+              <a:rPr sz="1000">
+                <a:solidFill>
+                  <a:srgbClr val="20242E"/>
+                </a:solidFill>
+                <a:latin typeface="Inter"/>
+              </a:rPr>
+              <a:t>¿Se podía fumar en el colegio o en el tren?</a:t>
+            </a:r>
+          </a:p>
+        </p:txBody>
+      </p:sp>
+      <p:sp>
+        <p:nvSpPr>
+          <p:cNvPr id="15" name="Tarjeta 2"/>
+          <p:cNvSpPr/>
+          <p:nvPr/>
+        </p:nvSpPr>
+        <p:spPr>
+          <a:xfrm>
+            <a:off x="6167628" y="2670048"/>
+            <a:ext cx="2708910" cy="1170432"/>
+          </a:xfrm>
+          <a:prstGeom prst="roundRect">
+            <a:avLst>
+              <a:gd name="adj" fmla="val 6000"/>
+            </a:avLst>
+          </a:prstGeom>
+          <a:solidFill>
+            <a:srgbClr val="FFFFFF"/>
+          </a:solidFill>
+          <a:ln w="12700">
+            <a:solidFill>
+              <a:srgbClr val="E4E3DE"/>
+            </a:solidFill>
+          </a:ln>
+          <a:effectLst/>
+        </p:spPr>
+        <p:style>
+          <a:lnRef idx="1">
+            <a:schemeClr val="accent1"/>
+          </a:lnRef>
+          <a:fillRef idx="3">
+            <a:schemeClr val="accent1"/>
+          </a:fillRef>
+          <a:effectRef idx="2">
+            <a:schemeClr val="accent1"/>
+          </a:effectRef>
+          <a:fontRef idx="minor">
+            <a:schemeClr val="lt1"/>
+          </a:fontRef>
+        </p:style>
+        <p:txBody>
+          <a:bodyPr rtlCol="0" anchor="ctr"/>
+          <a:lstStyle/>
+          <a:p/>
+        </p:txBody>
+      </p:sp>
+      <p:sp>
+        <p:nvSpPr>
+          <p:cNvPr id="16" name="TarjetaTxt 2"/>
+          <p:cNvSpPr txBox="1"/>
+          <p:nvPr/>
+        </p:nvSpPr>
+        <p:spPr>
+          <a:xfrm>
+            <a:off x="6259068" y="2724912"/>
+            <a:ext cx="2526030" cy="1060704"/>
+          </a:xfrm>
+          <a:prstGeom prst="rect">
+            <a:avLst/>
+          </a:prstGeom>
+          <a:noFill/>
+        </p:spPr>
+        <p:txBody>
+          <a:bodyPr wrap="square" anchor="t" lIns="45720" rIns="45720" tIns="27432" bIns="27432">
+            <a:normAutofit/>
+          </a:bodyPr>
+          <a:lstStyle/>
+          <a:p>
+            <a:pPr algn="l"/>
+            <a:r>
+              <a:rPr sz="1100" b="1">
+                <a:solidFill>
+                  <a:srgbClr val="5B3E83"/>
+                </a:solidFill>
+                <a:latin typeface="Bricolage Grotesque"/>
+              </a:rPr>
+              <a:t>pregunta</a:t>
+            </a:r>
+          </a:p>
+          <a:p>
+            <a:pPr algn="l"/>
+            <a:r>
+              <a:rPr sz="1000">
+                <a:solidFill>
+                  <a:srgbClr val="20242E"/>
+                </a:solidFill>
+                <a:latin typeface="Inter"/>
+              </a:rPr>
+              <a:t>¿Se podía llegar tarde a casa sin avisar?</a:t>
+            </a:r>
+          </a:p>
+        </p:txBody>
+      </p:sp>
+      <p:sp>
+        <p:nvSpPr>
+          <p:cNvPr id="17" name="Tarjeta 3"/>
+          <p:cNvSpPr/>
+          <p:nvPr/>
+        </p:nvSpPr>
+        <p:spPr>
+          <a:xfrm>
+            <a:off x="9022842" y="2670048"/>
+            <a:ext cx="2708910" cy="1170432"/>
+          </a:xfrm>
+          <a:prstGeom prst="roundRect">
+            <a:avLst>
+              <a:gd name="adj" fmla="val 6000"/>
+            </a:avLst>
+          </a:prstGeom>
+          <a:solidFill>
+            <a:srgbClr val="FFFFFF"/>
+          </a:solidFill>
+          <a:ln w="12700">
+            <a:solidFill>
+              <a:srgbClr val="E4E3DE"/>
+            </a:solidFill>
+          </a:ln>
+          <a:effectLst/>
+        </p:spPr>
+        <p:style>
+          <a:lnRef idx="1">
+            <a:schemeClr val="accent1"/>
+          </a:lnRef>
+          <a:fillRef idx="3">
+            <a:schemeClr val="accent1"/>
+          </a:fillRef>
+          <a:effectRef idx="2">
+            <a:schemeClr val="accent1"/>
+          </a:effectRef>
+          <a:fontRef idx="minor">
+            <a:schemeClr val="lt1"/>
+          </a:fontRef>
+        </p:style>
+        <p:txBody>
+          <a:bodyPr rtlCol="0" anchor="ctr"/>
+          <a:lstStyle/>
+          <a:p/>
+        </p:txBody>
+      </p:sp>
+      <p:sp>
+        <p:nvSpPr>
+          <p:cNvPr id="18" name="TarjetaTxt 3"/>
+          <p:cNvSpPr txBox="1"/>
+          <p:nvPr/>
+        </p:nvSpPr>
+        <p:spPr>
+          <a:xfrm>
+            <a:off x="9114282" y="2724912"/>
+            <a:ext cx="2526030" cy="1060704"/>
+          </a:xfrm>
+          <a:prstGeom prst="rect">
+            <a:avLst/>
+          </a:prstGeom>
+          <a:noFill/>
+        </p:spPr>
+        <p:txBody>
+          <a:bodyPr wrap="square" anchor="t" lIns="45720" rIns="45720" tIns="27432" bIns="27432">
+            <a:normAutofit/>
+          </a:bodyPr>
+          <a:lstStyle/>
+          <a:p>
+            <a:pPr algn="l"/>
+            <a:r>
+              <a:rPr sz="1100" b="1">
+                <a:solidFill>
+                  <a:srgbClr val="5B3E83"/>
+                </a:solidFill>
+                <a:latin typeface="Bricolage Grotesque"/>
+              </a:rPr>
+              <a:t>pregunta</a:t>
+            </a:r>
+          </a:p>
+          <a:p>
+            <a:pPr algn="l"/>
+            <a:r>
+              <a:rPr sz="1000">
+                <a:solidFill>
+                  <a:srgbClr val="20242E"/>
+                </a:solidFill>
+                <a:latin typeface="Inter"/>
+              </a:rPr>
+              <a:t>¿Se podía llamar por teléfono desde casa sin que nadie oyera?</a:t>
+            </a:r>
+          </a:p>
+        </p:txBody>
+      </p:sp>
+      <p:sp>
+        <p:nvSpPr>
+          <p:cNvPr id="19" name="Tarjeta 4"/>
+          <p:cNvSpPr/>
+          <p:nvPr/>
+        </p:nvSpPr>
+        <p:spPr>
+          <a:xfrm>
+            <a:off x="457200" y="3968496"/>
+            <a:ext cx="2708910" cy="1170432"/>
+          </a:xfrm>
+          <a:prstGeom prst="roundRect">
+            <a:avLst>
+              <a:gd name="adj" fmla="val 6000"/>
+            </a:avLst>
+          </a:prstGeom>
+          <a:solidFill>
+            <a:srgbClr val="FFFFFF"/>
+          </a:solidFill>
+          <a:ln w="12700">
+            <a:solidFill>
+              <a:srgbClr val="E4E3DE"/>
+            </a:solidFill>
+          </a:ln>
+          <a:effectLst/>
+        </p:spPr>
+        <p:style>
+          <a:lnRef idx="1">
+            <a:schemeClr val="accent1"/>
+          </a:lnRef>
+          <a:fillRef idx="3">
+            <a:schemeClr val="accent1"/>
+          </a:fillRef>
+          <a:effectRef idx="2">
+            <a:schemeClr val="accent1"/>
+          </a:effectRef>
+          <a:fontRef idx="minor">
+            <a:schemeClr val="lt1"/>
+          </a:fontRef>
+        </p:style>
+        <p:txBody>
+          <a:bodyPr rtlCol="0" anchor="ctr"/>
+          <a:lstStyle/>
+          <a:p/>
+        </p:txBody>
+      </p:sp>
+      <p:sp>
+        <p:nvSpPr>
+          <p:cNvPr id="20" name="TarjetaTxt 4"/>
+          <p:cNvSpPr txBox="1"/>
+          <p:nvPr/>
+        </p:nvSpPr>
+        <p:spPr>
+          <a:xfrm>
+            <a:off x="548640" y="4023360"/>
+            <a:ext cx="2526030" cy="1060704"/>
+          </a:xfrm>
+          <a:prstGeom prst="rect">
+            <a:avLst/>
+          </a:prstGeom>
+          <a:noFill/>
+        </p:spPr>
+        <p:txBody>
+          <a:bodyPr wrap="square" anchor="t" lIns="45720" rIns="45720" tIns="27432" bIns="27432">
+            <a:normAutofit/>
+          </a:bodyPr>
+          <a:lstStyle/>
+          <a:p>
+            <a:pPr algn="l"/>
+            <a:r>
+              <a:rPr sz="1100" b="1">
+                <a:solidFill>
+                  <a:srgbClr val="5B3E83"/>
+                </a:solidFill>
+                <a:latin typeface="Bricolage Grotesque"/>
+              </a:rPr>
+              <a:t>pregunta</a:t>
+            </a:r>
+          </a:p>
+          <a:p>
+            <a:pPr algn="l"/>
+            <a:r>
+              <a:rPr sz="1000">
+                <a:solidFill>
+                  <a:srgbClr val="20242E"/>
+                </a:solidFill>
+                <a:latin typeface="Inter"/>
+              </a:rPr>
+              <a:t>¿Se podía ir en bici sin casco?</a:t>
+            </a:r>
+          </a:p>
+        </p:txBody>
+      </p:sp>
+      <p:sp>
+        <p:nvSpPr>
+          <p:cNvPr id="21" name="Tarjeta 5"/>
+          <p:cNvSpPr/>
+          <p:nvPr/>
+        </p:nvSpPr>
+        <p:spPr>
+          <a:xfrm>
+            <a:off x="3312414" y="3968496"/>
+            <a:ext cx="2708910" cy="1170432"/>
+          </a:xfrm>
+          <a:prstGeom prst="roundRect">
+            <a:avLst>
+              <a:gd name="adj" fmla="val 6000"/>
+            </a:avLst>
+          </a:prstGeom>
+          <a:solidFill>
+            <a:srgbClr val="FFFFFF"/>
+          </a:solidFill>
+          <a:ln w="12700">
+            <a:solidFill>
+              <a:srgbClr val="E4E3DE"/>
+            </a:solidFill>
+          </a:ln>
+          <a:effectLst/>
+        </p:spPr>
+        <p:style>
+          <a:lnRef idx="1">
+            <a:schemeClr val="accent1"/>
+          </a:lnRef>
+          <a:fillRef idx="3">
+            <a:schemeClr val="accent1"/>
+          </a:fillRef>
+          <a:effectRef idx="2">
+            <a:schemeClr val="accent1"/>
+          </a:effectRef>
+          <a:fontRef idx="minor">
+            <a:schemeClr val="lt1"/>
+          </a:fontRef>
+        </p:style>
+        <p:txBody>
+          <a:bodyPr rtlCol="0" anchor="ctr"/>
+          <a:lstStyle/>
+          <a:p/>
+        </p:txBody>
+      </p:sp>
+      <p:sp>
+        <p:nvSpPr>
+          <p:cNvPr id="22" name="TarjetaTxt 5"/>
+          <p:cNvSpPr txBox="1"/>
+          <p:nvPr/>
+        </p:nvSpPr>
+        <p:spPr>
+          <a:xfrm>
+            <a:off x="3403854" y="4023360"/>
+            <a:ext cx="2526030" cy="1060704"/>
+          </a:xfrm>
+          <a:prstGeom prst="rect">
+            <a:avLst/>
+          </a:prstGeom>
+          <a:noFill/>
+        </p:spPr>
+        <p:txBody>
+          <a:bodyPr wrap="square" anchor="t" lIns="45720" rIns="45720" tIns="27432" bIns="27432">
+            <a:normAutofit/>
+          </a:bodyPr>
+          <a:lstStyle/>
+          <a:p>
+            <a:pPr algn="l"/>
+            <a:r>
+              <a:rPr sz="1100" b="1">
+                <a:solidFill>
+                  <a:srgbClr val="5B3E83"/>
+                </a:solidFill>
+                <a:latin typeface="Bricolage Grotesque"/>
+              </a:rPr>
+              <a:t>pregunta</a:t>
+            </a:r>
+          </a:p>
+          <a:p>
+            <a:pPr algn="l"/>
+            <a:r>
+              <a:rPr sz="1000">
+                <a:solidFill>
+                  <a:srgbClr val="20242E"/>
+                </a:solidFill>
+                <a:latin typeface="Inter"/>
+              </a:rPr>
+              <a:t>¿Se podía faltar a clase sin problemas en casa?</a:t>
+            </a:r>
+          </a:p>
+        </p:txBody>
+      </p:sp>
+      <p:sp>
+        <p:nvSpPr>
+          <p:cNvPr id="23" name="Tarjeta 6"/>
+          <p:cNvSpPr/>
+          <p:nvPr/>
+        </p:nvSpPr>
+        <p:spPr>
+          <a:xfrm>
+            <a:off x="6167628" y="3968496"/>
+            <a:ext cx="2708910" cy="1170432"/>
+          </a:xfrm>
+          <a:prstGeom prst="roundRect">
+            <a:avLst>
+              <a:gd name="adj" fmla="val 6000"/>
+            </a:avLst>
+          </a:prstGeom>
+          <a:solidFill>
+            <a:srgbClr val="FFFFFF"/>
+          </a:solidFill>
+          <a:ln w="12700">
+            <a:solidFill>
+              <a:srgbClr val="E4E3DE"/>
+            </a:solidFill>
+          </a:ln>
+          <a:effectLst/>
+        </p:spPr>
+        <p:style>
+          <a:lnRef idx="1">
+            <a:schemeClr val="accent1"/>
+          </a:lnRef>
+          <a:fillRef idx="3">
+            <a:schemeClr val="accent1"/>
+          </a:fillRef>
+          <a:effectRef idx="2">
+            <a:schemeClr val="accent1"/>
+          </a:effectRef>
+          <a:fontRef idx="minor">
+            <a:schemeClr val="lt1"/>
+          </a:fontRef>
+        </p:style>
+        <p:txBody>
+          <a:bodyPr rtlCol="0" anchor="ctr"/>
+          <a:lstStyle/>
+          <a:p/>
+        </p:txBody>
+      </p:sp>
+      <p:sp>
+        <p:nvSpPr>
+          <p:cNvPr id="24" name="TarjetaTxt 6"/>
+          <p:cNvSpPr txBox="1"/>
+          <p:nvPr/>
+        </p:nvSpPr>
+        <p:spPr>
+          <a:xfrm>
+            <a:off x="6259068" y="4023360"/>
+            <a:ext cx="2526030" cy="1060704"/>
+          </a:xfrm>
+          <a:prstGeom prst="rect">
+            <a:avLst/>
+          </a:prstGeom>
+          <a:noFill/>
+        </p:spPr>
+        <p:txBody>
+          <a:bodyPr wrap="square" anchor="t" lIns="45720" rIns="45720" tIns="27432" bIns="27432">
+            <a:normAutofit/>
+          </a:bodyPr>
+          <a:lstStyle/>
+          <a:p>
+            <a:pPr algn="l"/>
+            <a:r>
+              <a:rPr sz="1100" b="1">
+                <a:solidFill>
+                  <a:srgbClr val="5B3E83"/>
+                </a:solidFill>
+                <a:latin typeface="Bricolage Grotesque"/>
+              </a:rPr>
+              <a:t>marco</a:t>
+            </a:r>
+          </a:p>
+          <a:p>
+            <a:pPr algn="l"/>
+            <a:r>
+              <a:rPr sz="1000">
+                <a:solidFill>
+                  <a:srgbClr val="20242E"/>
+                </a:solidFill>
+                <a:latin typeface="Inter"/>
+              </a:rPr>
+              <a:t>Mi … dice que antes se podía …</a:t>
+            </a:r>
+          </a:p>
+        </p:txBody>
+      </p:sp>
+      <p:sp>
+        <p:nvSpPr>
+          <p:cNvPr id="25" name="Tarjeta 7"/>
+          <p:cNvSpPr/>
+          <p:nvPr/>
+        </p:nvSpPr>
+        <p:spPr>
+          <a:xfrm>
+            <a:off x="9022842" y="3968496"/>
+            <a:ext cx="2708910" cy="1170432"/>
+          </a:xfrm>
+          <a:prstGeom prst="roundRect">
+            <a:avLst>
+              <a:gd name="adj" fmla="val 6000"/>
+            </a:avLst>
+          </a:prstGeom>
+          <a:solidFill>
+            <a:srgbClr val="FFFFFF"/>
+          </a:solidFill>
+          <a:ln w="12700">
+            <a:solidFill>
+              <a:srgbClr val="E4E3DE"/>
+            </a:solidFill>
+          </a:ln>
+          <a:effectLst/>
+        </p:spPr>
+        <p:style>
+          <a:lnRef idx="1">
+            <a:schemeClr val="accent1"/>
+          </a:lnRef>
+          <a:fillRef idx="3">
+            <a:schemeClr val="accent1"/>
+          </a:fillRef>
+          <a:effectRef idx="2">
+            <a:schemeClr val="accent1"/>
+          </a:effectRef>
+          <a:fontRef idx="minor">
+            <a:schemeClr val="lt1"/>
+          </a:fontRef>
+        </p:style>
+        <p:txBody>
+          <a:bodyPr rtlCol="0" anchor="ctr"/>
+          <a:lstStyle/>
+          <a:p/>
+        </p:txBody>
+      </p:sp>
+      <p:sp>
+        <p:nvSpPr>
+          <p:cNvPr id="26" name="TarjetaTxt 7"/>
+          <p:cNvSpPr txBox="1"/>
+          <p:nvPr/>
+        </p:nvSpPr>
+        <p:spPr>
+          <a:xfrm>
+            <a:off x="9114282" y="4023360"/>
+            <a:ext cx="2526030" cy="1060704"/>
+          </a:xfrm>
+          <a:prstGeom prst="rect">
+            <a:avLst/>
+          </a:prstGeom>
+          <a:noFill/>
+        </p:spPr>
+        <p:txBody>
+          <a:bodyPr wrap="square" anchor="t" lIns="45720" rIns="45720" tIns="27432" bIns="27432">
+            <a:normAutofit/>
+          </a:bodyPr>
+          <a:lstStyle/>
+          <a:p>
+            <a:pPr algn="l"/>
+            <a:r>
+              <a:rPr sz="1100" b="1">
+                <a:solidFill>
+                  <a:srgbClr val="5B3E83"/>
+                </a:solidFill>
+                <a:latin typeface="Bricolage Grotesque"/>
+              </a:rPr>
+              <a:t>marco</a:t>
+            </a:r>
+          </a:p>
+          <a:p>
+            <a:pPr algn="l"/>
+            <a:r>
+              <a:rPr sz="1000">
+                <a:solidFill>
+                  <a:srgbClr val="20242E"/>
+                </a:solidFill>
+                <a:latin typeface="Inter"/>
+              </a:rPr>
+              <a:t>Cuando era pequeño/-a, … y nadie …</a:t>
+            </a:r>
+          </a:p>
+        </p:txBody>
+      </p:sp>
+      <p:sp>
+        <p:nvSpPr>
+          <p:cNvPr id="27" name="Tarjeta 8"/>
+          <p:cNvSpPr/>
+          <p:nvPr/>
+        </p:nvSpPr>
+        <p:spPr>
+          <a:xfrm>
+            <a:off x="457200" y="5266944"/>
+            <a:ext cx="2708910" cy="1170432"/>
+          </a:xfrm>
+          <a:prstGeom prst="roundRect">
+            <a:avLst>
+              <a:gd name="adj" fmla="val 6000"/>
+            </a:avLst>
+          </a:prstGeom>
+          <a:solidFill>
+            <a:srgbClr val="FFFFFF"/>
+          </a:solidFill>
+          <a:ln w="12700">
+            <a:solidFill>
+              <a:srgbClr val="E4E3DE"/>
+            </a:solidFill>
+          </a:ln>
+          <a:effectLst/>
+        </p:spPr>
+        <p:style>
+          <a:lnRef idx="1">
+            <a:schemeClr val="accent1"/>
+          </a:lnRef>
+          <a:fillRef idx="3">
+            <a:schemeClr val="accent1"/>
+          </a:fillRef>
+          <a:effectRef idx="2">
+            <a:schemeClr val="accent1"/>
+          </a:effectRef>
+          <a:fontRef idx="minor">
+            <a:schemeClr val="lt1"/>
+          </a:fontRef>
+        </p:style>
+        <p:txBody>
+          <a:bodyPr rtlCol="0" anchor="ctr"/>
+          <a:lstStyle/>
+          <a:p/>
+        </p:txBody>
+      </p:sp>
+      <p:sp>
+        <p:nvSpPr>
+          <p:cNvPr id="28" name="TarjetaTxt 8"/>
+          <p:cNvSpPr txBox="1"/>
+          <p:nvPr/>
+        </p:nvSpPr>
+        <p:spPr>
+          <a:xfrm>
+            <a:off x="548640" y="5321808"/>
+            <a:ext cx="2526030" cy="1060704"/>
+          </a:xfrm>
+          <a:prstGeom prst="rect">
+            <a:avLst/>
+          </a:prstGeom>
+          <a:noFill/>
+        </p:spPr>
+        <p:txBody>
+          <a:bodyPr wrap="square" anchor="t" lIns="45720" rIns="45720" tIns="27432" bIns="27432">
+            <a:normAutofit/>
+          </a:bodyPr>
+          <a:lstStyle/>
+          <a:p>
+            <a:pPr algn="l"/>
+            <a:r>
+              <a:rPr sz="1100" b="1">
+                <a:solidFill>
+                  <a:srgbClr val="5B3E83"/>
+                </a:solidFill>
+                <a:latin typeface="Bricolage Grotesque"/>
+              </a:rPr>
+              <a:t>marco</a:t>
+            </a:r>
+          </a:p>
+          <a:p>
+            <a:pPr algn="l"/>
+            <a:r>
+              <a:rPr sz="1000">
+                <a:solidFill>
+                  <a:srgbClr val="20242E"/>
+                </a:solidFill>
+                <a:latin typeface="Inter"/>
+              </a:rPr>
+              <a:t>Ahora ya no se puede, porque …</a:t>
+            </a:r>
+          </a:p>
+        </p:txBody>
+      </p:sp>
+      <p:sp>
+        <p:nvSpPr>
+          <p:cNvPr id="29" name="Tarjeta 9"/>
+          <p:cNvSpPr/>
+          <p:nvPr/>
+        </p:nvSpPr>
+        <p:spPr>
+          <a:xfrm>
+            <a:off x="3312414" y="5266944"/>
+            <a:ext cx="2708910" cy="1170432"/>
+          </a:xfrm>
+          <a:prstGeom prst="roundRect">
+            <a:avLst>
+              <a:gd name="adj" fmla="val 6000"/>
+            </a:avLst>
+          </a:prstGeom>
+          <a:solidFill>
+            <a:srgbClr val="FFFFFF"/>
+          </a:solidFill>
+          <a:ln w="12700">
+            <a:solidFill>
+              <a:srgbClr val="E4E3DE"/>
+            </a:solidFill>
+          </a:ln>
+          <a:effectLst/>
+        </p:spPr>
+        <p:style>
+          <a:lnRef idx="1">
+            <a:schemeClr val="accent1"/>
+          </a:lnRef>
+          <a:fillRef idx="3">
+            <a:schemeClr val="accent1"/>
+          </a:fillRef>
+          <a:effectRef idx="2">
+            <a:schemeClr val="accent1"/>
+          </a:effectRef>
+          <a:fontRef idx="minor">
+            <a:schemeClr val="lt1"/>
+          </a:fontRef>
+        </p:style>
+        <p:txBody>
+          <a:bodyPr rtlCol="0" anchor="ctr"/>
+          <a:lstStyle/>
+          <a:p/>
+        </p:txBody>
+      </p:sp>
+      <p:sp>
+        <p:nvSpPr>
+          <p:cNvPr id="30" name="TarjetaTxt 9"/>
+          <p:cNvSpPr txBox="1"/>
+          <p:nvPr/>
+        </p:nvSpPr>
+        <p:spPr>
+          <a:xfrm>
+            <a:off x="3403854" y="5321808"/>
+            <a:ext cx="2526030" cy="1060704"/>
+          </a:xfrm>
+          <a:prstGeom prst="rect">
+            <a:avLst/>
+          </a:prstGeom>
+          <a:noFill/>
+        </p:spPr>
+        <p:txBody>
+          <a:bodyPr wrap="square" anchor="t" lIns="45720" rIns="45720" tIns="27432" bIns="27432">
+            <a:normAutofit/>
+          </a:bodyPr>
+          <a:lstStyle/>
+          <a:p>
+            <a:pPr algn="l"/>
+            <a:r>
+              <a:rPr sz="1100" b="1">
+                <a:solidFill>
+                  <a:srgbClr val="5B3E83"/>
+                </a:solidFill>
+                <a:latin typeface="Bricolage Grotesque"/>
+              </a:rPr>
+              <a:t>marco</a:t>
+            </a:r>
+          </a:p>
+          <a:p>
+            <a:pPr algn="l"/>
+            <a:r>
+              <a:rPr sz="1000">
+                <a:solidFill>
+                  <a:srgbClr val="20242E"/>
+                </a:solidFill>
+                <a:latin typeface="Inter"/>
+              </a:rPr>
+              <a:t>Lo que más ha cambiado es …</a:t>
+            </a:r>
+          </a:p>
+        </p:txBody>
+      </p:sp>
+      <p:sp>
+        <p:nvSpPr>
+          <p:cNvPr id="31" name="Tarjeta 10"/>
+          <p:cNvSpPr/>
+          <p:nvPr/>
+        </p:nvSpPr>
+        <p:spPr>
+          <a:xfrm>
+            <a:off x="6167628" y="5266944"/>
+            <a:ext cx="2708910" cy="1170432"/>
+          </a:xfrm>
+          <a:prstGeom prst="roundRect">
+            <a:avLst>
+              <a:gd name="adj" fmla="val 6000"/>
+            </a:avLst>
+          </a:prstGeom>
+          <a:solidFill>
+            <a:srgbClr val="FFFFFF"/>
+          </a:solidFill>
+          <a:ln w="12700">
+            <a:solidFill>
+              <a:srgbClr val="E4E3DE"/>
+            </a:solidFill>
+          </a:ln>
+          <a:effectLst/>
+        </p:spPr>
+        <p:style>
+          <a:lnRef idx="1">
+            <a:schemeClr val="accent1"/>
+          </a:lnRef>
+          <a:fillRef idx="3">
+            <a:schemeClr val="accent1"/>
+          </a:fillRef>
+          <a:effectRef idx="2">
+            <a:schemeClr val="accent1"/>
+          </a:effectRef>
+          <a:fontRef idx="minor">
+            <a:schemeClr val="lt1"/>
+          </a:fontRef>
+        </p:style>
+        <p:txBody>
+          <a:bodyPr rtlCol="0" anchor="ctr"/>
+          <a:lstStyle/>
+          <a:p/>
+        </p:txBody>
+      </p:sp>
+      <p:sp>
+        <p:nvSpPr>
+          <p:cNvPr id="32" name="TarjetaTxt 10"/>
+          <p:cNvSpPr txBox="1"/>
+          <p:nvPr/>
+        </p:nvSpPr>
+        <p:spPr>
+          <a:xfrm>
+            <a:off x="6259068" y="5321808"/>
+            <a:ext cx="2526030" cy="1060704"/>
+          </a:xfrm>
+          <a:prstGeom prst="rect">
+            <a:avLst/>
+          </a:prstGeom>
+          <a:noFill/>
+        </p:spPr>
+        <p:txBody>
+          <a:bodyPr wrap="square" anchor="t" lIns="45720" rIns="45720" tIns="27432" bIns="27432">
+            <a:normAutofit/>
+          </a:bodyPr>
+          <a:lstStyle/>
+          <a:p>
+            <a:pPr algn="l"/>
+            <a:r>
+              <a:rPr sz="1100" b="1">
+                <a:solidFill>
+                  <a:srgbClr val="5B3E83"/>
+                </a:solidFill>
+                <a:latin typeface="Bricolage Grotesque"/>
+              </a:rPr>
+              <a:t>Aviso</a:t>
+            </a:r>
+          </a:p>
+          <a:p>
+            <a:pPr algn="l"/>
+            <a:r>
+              <a:rPr sz="1000">
+                <a:solidFill>
+                  <a:srgbClr val="20242E"/>
+                </a:solidFill>
+                <a:latin typeface="Inter"/>
+              </a:rPr>
+              <a:t>Si no hay un adulto disponible, la persona entrevistada puede ser el/la profe.</a:t>
+            </a:r>
+          </a:p>
+        </p:txBody>
+      </p:sp>
+    </p:spTree>
+  </p:cSld>
+  <p:clrMapOvr>
+    <a:masterClrMapping/>
+  </p:clrMapOvr>
+</p:sld>
+</file>
+
+<file path=ppt/slides/slide24.xml><?xml version="1.0" encoding="utf-8"?>
+<p:sld xmlns:a="http://schemas.openxmlformats.org/drawingml/2006/main" xmlns:p="http://schemas.openxmlformats.org/presentationml/2006/main" xmlns:r="http://schemas.openxmlformats.org/officeDocument/2006/relationships">
+  <p:cSld>
+    <p:spTree>
+      <p:nvGrpSpPr>
+        <p:cNvPr id="1" name=""/>
+        <p:cNvGrpSpPr/>
+        <p:nvPr/>
+      </p:nvGrpSpPr>
+      <p:grpSpPr/>
+      <p:sp>
+        <p:nvSpPr>
+          <p:cNvPr id="2" name="Fondo"/>
+          <p:cNvSpPr/>
+          <p:nvPr/>
+        </p:nvSpPr>
+        <p:spPr>
+          <a:xfrm>
+            <a:off x="0" y="0"/>
+            <a:ext cx="12191695" cy="6858000"/>
+          </a:xfrm>
+          <a:prstGeom prst="rect">
+            <a:avLst/>
+          </a:prstGeom>
+          <a:solidFill>
+            <a:srgbClr val="FCFBF8"/>
+          </a:solidFill>
+          <a:ln>
+            <a:noFill/>
+          </a:ln>
+          <a:effectLst/>
+        </p:spPr>
+        <p:style>
+          <a:lnRef idx="1">
+            <a:schemeClr val="accent1"/>
+          </a:lnRef>
+          <a:fillRef idx="3">
+            <a:schemeClr val="accent1"/>
+          </a:fillRef>
+          <a:effectRef idx="2">
+            <a:schemeClr val="accent1"/>
+          </a:effectRef>
+          <a:fontRef idx="minor">
+            <a:schemeClr val="lt1"/>
+          </a:fontRef>
+        </p:style>
+        <p:txBody>
+          <a:bodyPr rtlCol="0" anchor="ctr"/>
+          <a:lstStyle/>
+          <a:p/>
+        </p:txBody>
+      </p:sp>
+      <p:sp>
+        <p:nvSpPr>
+          <p:cNvPr id="3" name="Cabecera"/>
+          <p:cNvSpPr/>
+          <p:nvPr/>
+        </p:nvSpPr>
+        <p:spPr>
+          <a:xfrm>
+            <a:off x="0" y="0"/>
+            <a:ext cx="12191695" cy="1078992"/>
+          </a:xfrm>
+          <a:prstGeom prst="rect">
+            <a:avLst/>
+          </a:prstGeom>
+          <a:solidFill>
+            <a:srgbClr val="7C56A9"/>
+          </a:solidFill>
+          <a:ln>
+            <a:noFill/>
+          </a:ln>
+          <a:effectLst/>
+        </p:spPr>
+        <p:style>
+          <a:lnRef idx="1">
+            <a:schemeClr val="accent1"/>
+          </a:lnRef>
+          <a:fillRef idx="3">
+            <a:schemeClr val="accent1"/>
+          </a:fillRef>
+          <a:effectRef idx="2">
+            <a:schemeClr val="accent1"/>
+          </a:effectRef>
+          <a:fontRef idx="minor">
+            <a:schemeClr val="lt1"/>
+          </a:fontRef>
+        </p:style>
+        <p:txBody>
+          <a:bodyPr rtlCol="0" anchor="ctr"/>
+          <a:lstStyle/>
+          <a:p/>
+        </p:txBody>
+      </p:sp>
+      <p:sp>
+        <p:nvSpPr>
+          <p:cNvPr id="4" name="Chip"/>
+          <p:cNvSpPr/>
+          <p:nvPr/>
+        </p:nvSpPr>
+        <p:spPr>
+          <a:xfrm>
+            <a:off x="457200" y="182880"/>
+            <a:ext cx="3017520" cy="292608"/>
+          </a:xfrm>
+          <a:prstGeom prst="roundRect">
+            <a:avLst>
+              <a:gd name="adj" fmla="val 50000"/>
+            </a:avLst>
+          </a:prstGeom>
+          <a:solidFill>
+            <a:srgbClr val="FFFFFF"/>
+          </a:solidFill>
+          <a:ln>
+            <a:noFill/>
+          </a:ln>
+          <a:effectLst/>
+        </p:spPr>
+        <p:style>
+          <a:lnRef idx="1">
+            <a:schemeClr val="accent1"/>
+          </a:lnRef>
+          <a:fillRef idx="3">
+            <a:schemeClr val="accent1"/>
+          </a:fillRef>
+          <a:effectRef idx="2">
+            <a:schemeClr val="accent1"/>
+          </a:effectRef>
+          <a:fontRef idx="minor">
+            <a:schemeClr val="lt1"/>
+          </a:fontRef>
+        </p:style>
+        <p:txBody>
+          <a:bodyPr rtlCol="0" anchor="ctr"/>
+          <a:lstStyle/>
+          <a:p/>
+        </p:txBody>
+      </p:sp>
+      <p:sp>
+        <p:nvSpPr>
+          <p:cNvPr id="5" name="ChipTxt"/>
+          <p:cNvSpPr txBox="1"/>
+          <p:nvPr/>
+        </p:nvSpPr>
+        <p:spPr>
+          <a:xfrm>
+            <a:off x="457200" y="173736"/>
+            <a:ext cx="3017520" cy="310896"/>
+          </a:xfrm>
+          <a:prstGeom prst="rect">
+            <a:avLst/>
+          </a:prstGeom>
+          <a:noFill/>
+        </p:spPr>
+        <p:txBody>
+          <a:bodyPr wrap="square" anchor="ctr" lIns="45720" rIns="45720" tIns="27432" bIns="27432">
+            <a:normAutofit/>
+          </a:bodyPr>
+          <a:lstStyle/>
+          <a:p>
+            <a:pPr algn="ctr"/>
+            <a:r>
+              <a:rPr sz="950" b="1">
+                <a:solidFill>
+                  <a:srgbClr val="5B3E83"/>
+                </a:solidFill>
+                <a:latin typeface="Inter"/>
+              </a:rPr>
+              <a:t>RETO 9 · ONDERHANDELING &amp; DILEMMA</a:t>
+            </a:r>
+          </a:p>
+        </p:txBody>
+      </p:sp>
+      <p:sp>
+        <p:nvSpPr>
+          <p:cNvPr id="6" name="Titulo"/>
+          <p:cNvSpPr txBox="1"/>
+          <p:nvPr/>
+        </p:nvSpPr>
+        <p:spPr>
+          <a:xfrm>
+            <a:off x="457200" y="502920"/>
+            <a:ext cx="8412480" cy="475488"/>
+          </a:xfrm>
+          <a:prstGeom prst="rect">
+            <a:avLst/>
+          </a:prstGeom>
+          <a:noFill/>
+        </p:spPr>
+        <p:txBody>
+          <a:bodyPr wrap="square" anchor="t" lIns="45720" rIns="45720" tIns="27432" bIns="27432">
+            <a:normAutofit/>
+          </a:bodyPr>
+          <a:lstStyle/>
+          <a:p>
+            <a:pPr algn="l"/>
+            <a:r>
+              <a:rPr sz="2700" b="1">
+                <a:solidFill>
+                  <a:srgbClr val="FFFFFF"/>
+                </a:solidFill>
+                <a:latin typeface="Bricolage Grotesque"/>
+              </a:rPr>
+              <a:t>El juicio a la nostalgia</a:t>
+            </a:r>
+          </a:p>
+        </p:txBody>
+      </p:sp>
+      <p:sp>
+        <p:nvSpPr>
+          <p:cNvPr id="7" name="Badges"/>
+          <p:cNvSpPr txBox="1"/>
+          <p:nvPr/>
+        </p:nvSpPr>
+        <p:spPr>
+          <a:xfrm>
+            <a:off x="9052560" y="256032"/>
+            <a:ext cx="2651760" cy="640080"/>
+          </a:xfrm>
+          <a:prstGeom prst="rect">
+            <a:avLst/>
+          </a:prstGeom>
+          <a:noFill/>
+        </p:spPr>
+        <p:txBody>
+          <a:bodyPr wrap="square" anchor="t" lIns="45720" rIns="45720" tIns="27432" bIns="27432">
+            <a:normAutofit/>
+          </a:bodyPr>
+          <a:lstStyle/>
+          <a:p>
+            <a:pPr algn="r"/>
+            <a:r>
+              <a:rPr sz="1000">
+                <a:solidFill>
+                  <a:srgbClr val="EEE8F5"/>
+                </a:solidFill>
+                <a:latin typeface="Inter"/>
+              </a:rPr>
+              <a:t>🏫 Toda la clase</a:t>
+            </a:r>
+          </a:p>
+          <a:p>
+            <a:pPr algn="r"/>
+            <a:r>
+              <a:rPr sz="1000">
+                <a:solidFill>
+                  <a:srgbClr val="EEE8F5"/>
+                </a:solidFill>
+                <a:latin typeface="Inter"/>
+              </a:rPr>
+              <a:t>± 18 min · ★★★</a:t>
+            </a:r>
+          </a:p>
+        </p:txBody>
+      </p:sp>
+      <p:sp>
+        <p:nvSpPr>
+          <p:cNvPr id="8" name="Gancho"/>
+          <p:cNvSpPr txBox="1"/>
+          <p:nvPr/>
+        </p:nvSpPr>
+        <p:spPr>
+          <a:xfrm>
+            <a:off x="457200" y="1225296"/>
+            <a:ext cx="11274552" cy="566928"/>
+          </a:xfrm>
+          <a:prstGeom prst="rect">
+            <a:avLst/>
+          </a:prstGeom>
+          <a:noFill/>
+        </p:spPr>
+        <p:txBody>
+          <a:bodyPr wrap="square" anchor="t" lIns="45720" rIns="45720" tIns="27432" bIns="27432">
+            <a:normAutofit/>
+          </a:bodyPr>
+          <a:lstStyle/>
+          <a:p>
+            <a:pPr algn="l"/>
+            <a:r>
+              <a:rPr sz="1600" b="1">
+                <a:solidFill>
+                  <a:srgbClr val="5B3E83"/>
+                </a:solidFill>
+                <a:latin typeface="Bricolage Grotesque"/>
+              </a:rPr>
+              <a:t>¿Se vivía mejor antes? La clase decide, pero con pruebas.</a:t>
+            </a:r>
+          </a:p>
+          <a:p>
+            <a:pPr algn="l"/>
+            <a:r>
+              <a:rPr sz="1100" i="1">
+                <a:solidFill>
+                  <a:srgbClr val="6A6E78"/>
+                </a:solidFill>
+                <a:latin typeface="Inter"/>
+              </a:rPr>
+              <a:t>Leefde men vroeger beter? De klas beslist, maar met bewijs.</a:t>
+            </a:r>
+          </a:p>
+        </p:txBody>
+      </p:sp>
+      <p:sp>
+        <p:nvSpPr>
+          <p:cNvPr id="9" name="ReglaCaja"/>
+          <p:cNvSpPr/>
+          <p:nvPr/>
+        </p:nvSpPr>
+        <p:spPr>
+          <a:xfrm>
+            <a:off x="457200" y="1847088"/>
+            <a:ext cx="11274552" cy="658368"/>
+          </a:xfrm>
+          <a:prstGeom prst="roundRect">
+            <a:avLst>
+              <a:gd name="adj" fmla="val 5000"/>
+            </a:avLst>
+          </a:prstGeom>
+          <a:solidFill>
+            <a:srgbClr val="FBF3D6"/>
+          </a:solidFill>
+          <a:ln>
+            <a:noFill/>
+          </a:ln>
+          <a:effectLst/>
+        </p:spPr>
+        <p:style>
+          <a:lnRef idx="1">
+            <a:schemeClr val="accent1"/>
+          </a:lnRef>
+          <a:fillRef idx="3">
+            <a:schemeClr val="accent1"/>
+          </a:fillRef>
+          <a:effectRef idx="2">
+            <a:schemeClr val="accent1"/>
+          </a:effectRef>
+          <a:fontRef idx="minor">
+            <a:schemeClr val="lt1"/>
+          </a:fontRef>
+        </p:style>
+        <p:txBody>
+          <a:bodyPr rtlCol="0" anchor="ctr"/>
+          <a:lstStyle/>
+          <a:p/>
+        </p:txBody>
+      </p:sp>
+      <p:sp>
+        <p:nvSpPr>
+          <p:cNvPr id="10" name="ReglaTxt"/>
+          <p:cNvSpPr txBox="1"/>
+          <p:nvPr/>
+        </p:nvSpPr>
+        <p:spPr>
+          <a:xfrm>
+            <a:off x="603504" y="1883664"/>
+            <a:ext cx="10972800" cy="585216"/>
+          </a:xfrm>
+          <a:prstGeom prst="rect">
+            <a:avLst/>
+          </a:prstGeom>
+          <a:noFill/>
+        </p:spPr>
+        <p:txBody>
+          <a:bodyPr wrap="square" anchor="t" lIns="45720" rIns="45720" tIns="27432" bIns="27432">
+            <a:normAutofit/>
+          </a:bodyPr>
+          <a:lstStyle/>
+          <a:p>
+            <a:pPr algn="l"/>
+            <a:r>
+              <a:rPr sz="850" b="1">
+                <a:solidFill>
+                  <a:srgbClr val="B7860B"/>
+                </a:solidFill>
+                <a:latin typeface="Inter"/>
+              </a:rPr>
+              <a:t>LA REGLA DEL RETO</a:t>
+            </a:r>
+          </a:p>
+          <a:p>
+            <a:pPr algn="l"/>
+            <a:r>
+              <a:rPr sz="1100">
+                <a:solidFill>
+                  <a:srgbClr val="20242E"/>
+                </a:solidFill>
+                <a:latin typeface="Inter"/>
+              </a:rPr>
+              <a:t>Een argument zonder imperfecto én zonder comparativo telt niet mee. En je mag geen argument herhalen dat al gevallen is — ook niet met andere woorden.</a:t>
+            </a:r>
+          </a:p>
+        </p:txBody>
+      </p:sp>
+      <p:sp>
+        <p:nvSpPr>
+          <p:cNvPr id="11" name="Tarjeta 0"/>
+          <p:cNvSpPr/>
+          <p:nvPr/>
+        </p:nvSpPr>
+        <p:spPr>
+          <a:xfrm>
+            <a:off x="457200" y="2670048"/>
+            <a:ext cx="2708910" cy="1170432"/>
+          </a:xfrm>
+          <a:prstGeom prst="roundRect">
+            <a:avLst>
+              <a:gd name="adj" fmla="val 6000"/>
+            </a:avLst>
+          </a:prstGeom>
+          <a:solidFill>
+            <a:srgbClr val="FFFFFF"/>
+          </a:solidFill>
+          <a:ln w="12700">
+            <a:solidFill>
+              <a:srgbClr val="E4E3DE"/>
+            </a:solidFill>
+          </a:ln>
+          <a:effectLst/>
+        </p:spPr>
+        <p:style>
+          <a:lnRef idx="1">
+            <a:schemeClr val="accent1"/>
+          </a:lnRef>
+          <a:fillRef idx="3">
+            <a:schemeClr val="accent1"/>
+          </a:fillRef>
+          <a:effectRef idx="2">
+            <a:schemeClr val="accent1"/>
+          </a:effectRef>
+          <a:fontRef idx="minor">
+            <a:schemeClr val="lt1"/>
+          </a:fontRef>
+        </p:style>
+        <p:txBody>
+          <a:bodyPr rtlCol="0" anchor="ctr"/>
+          <a:lstStyle/>
+          <a:p/>
+        </p:txBody>
+      </p:sp>
+      <p:sp>
+        <p:nvSpPr>
+          <p:cNvPr id="12" name="TarjetaTxt 0"/>
+          <p:cNvSpPr txBox="1"/>
+          <p:nvPr/>
+        </p:nvSpPr>
+        <p:spPr>
+          <a:xfrm>
+            <a:off x="548640" y="2724912"/>
+            <a:ext cx="2526030" cy="1060704"/>
+          </a:xfrm>
+          <a:prstGeom prst="rect">
+            <a:avLst/>
+          </a:prstGeom>
+          <a:noFill/>
+        </p:spPr>
+        <p:txBody>
+          <a:bodyPr wrap="square" anchor="t" lIns="45720" rIns="45720" tIns="27432" bIns="27432">
+            <a:normAutofit/>
+          </a:bodyPr>
+          <a:lstStyle/>
+          <a:p>
+            <a:pPr algn="l"/>
+            <a:r>
+              <a:rPr sz="1100" b="1">
+                <a:solidFill>
+                  <a:srgbClr val="5B3E83"/>
+                </a:solidFill>
+                <a:latin typeface="Bricolage Grotesque"/>
+              </a:rPr>
+              <a:t>el tiempo libre</a:t>
+            </a:r>
+          </a:p>
+          <a:p>
+            <a:pPr algn="l"/>
+            <a:r>
+              <a:rPr sz="1000">
+                <a:solidFill>
+                  <a:srgbClr val="20242E"/>
+                </a:solidFill>
+                <a:latin typeface="Inter"/>
+              </a:rPr>
+              <a:t>antes había menos actividades organizadas</a:t>
+            </a:r>
+          </a:p>
+        </p:txBody>
+      </p:sp>
+      <p:sp>
+        <p:nvSpPr>
+          <p:cNvPr id="13" name="Tarjeta 1"/>
+          <p:cNvSpPr/>
+          <p:nvPr/>
+        </p:nvSpPr>
+        <p:spPr>
+          <a:xfrm>
+            <a:off x="3312414" y="2670048"/>
+            <a:ext cx="2708910" cy="1170432"/>
+          </a:xfrm>
+          <a:prstGeom prst="roundRect">
+            <a:avLst>
+              <a:gd name="adj" fmla="val 6000"/>
+            </a:avLst>
+          </a:prstGeom>
+          <a:solidFill>
+            <a:srgbClr val="FFFFFF"/>
+          </a:solidFill>
+          <a:ln w="12700">
+            <a:solidFill>
+              <a:srgbClr val="E4E3DE"/>
+            </a:solidFill>
+          </a:ln>
+          <a:effectLst/>
+        </p:spPr>
+        <p:style>
+          <a:lnRef idx="1">
+            <a:schemeClr val="accent1"/>
+          </a:lnRef>
+          <a:fillRef idx="3">
+            <a:schemeClr val="accent1"/>
+          </a:fillRef>
+          <a:effectRef idx="2">
+            <a:schemeClr val="accent1"/>
+          </a:effectRef>
+          <a:fontRef idx="minor">
+            <a:schemeClr val="lt1"/>
+          </a:fontRef>
+        </p:style>
+        <p:txBody>
+          <a:bodyPr rtlCol="0" anchor="ctr"/>
+          <a:lstStyle/>
+          <a:p/>
+        </p:txBody>
+      </p:sp>
+      <p:sp>
+        <p:nvSpPr>
+          <p:cNvPr id="14" name="TarjetaTxt 1"/>
+          <p:cNvSpPr txBox="1"/>
+          <p:nvPr/>
+        </p:nvSpPr>
+        <p:spPr>
+          <a:xfrm>
+            <a:off x="3403854" y="2724912"/>
+            <a:ext cx="2526030" cy="1060704"/>
+          </a:xfrm>
+          <a:prstGeom prst="rect">
+            <a:avLst/>
+          </a:prstGeom>
+          <a:noFill/>
+        </p:spPr>
+        <p:txBody>
+          <a:bodyPr wrap="square" anchor="t" lIns="45720" rIns="45720" tIns="27432" bIns="27432">
+            <a:normAutofit/>
+          </a:bodyPr>
+          <a:lstStyle/>
+          <a:p>
+            <a:pPr algn="l"/>
+            <a:r>
+              <a:rPr sz="1100" b="1">
+                <a:solidFill>
+                  <a:srgbClr val="5B3E83"/>
+                </a:solidFill>
+                <a:latin typeface="Bricolage Grotesque"/>
+              </a:rPr>
+              <a:t>las amistades</a:t>
+            </a:r>
+          </a:p>
+          <a:p>
+            <a:pPr algn="l"/>
+            <a:r>
+              <a:rPr sz="1000">
+                <a:solidFill>
+                  <a:srgbClr val="20242E"/>
+                </a:solidFill>
+                <a:latin typeface="Inter"/>
+              </a:rPr>
+              <a:t>antes se veía a los amigos solo en persona</a:t>
+            </a:r>
+          </a:p>
+        </p:txBody>
+      </p:sp>
+      <p:sp>
+        <p:nvSpPr>
+          <p:cNvPr id="15" name="Tarjeta 2"/>
+          <p:cNvSpPr/>
+          <p:nvPr/>
+        </p:nvSpPr>
+        <p:spPr>
+          <a:xfrm>
+            <a:off x="6167628" y="2670048"/>
+            <a:ext cx="2708910" cy="1170432"/>
+          </a:xfrm>
+          <a:prstGeom prst="roundRect">
+            <a:avLst>
+              <a:gd name="adj" fmla="val 6000"/>
+            </a:avLst>
+          </a:prstGeom>
+          <a:solidFill>
+            <a:srgbClr val="FFFFFF"/>
+          </a:solidFill>
+          <a:ln w="12700">
+            <a:solidFill>
+              <a:srgbClr val="E4E3DE"/>
+            </a:solidFill>
+          </a:ln>
+          <a:effectLst/>
+        </p:spPr>
+        <p:style>
+          <a:lnRef idx="1">
+            <a:schemeClr val="accent1"/>
+          </a:lnRef>
+          <a:fillRef idx="3">
+            <a:schemeClr val="accent1"/>
+          </a:fillRef>
+          <a:effectRef idx="2">
+            <a:schemeClr val="accent1"/>
+          </a:effectRef>
+          <a:fontRef idx="minor">
+            <a:schemeClr val="lt1"/>
+          </a:fontRef>
+        </p:style>
+        <p:txBody>
+          <a:bodyPr rtlCol="0" anchor="ctr"/>
+          <a:lstStyle/>
+          <a:p/>
+        </p:txBody>
+      </p:sp>
+      <p:sp>
+        <p:nvSpPr>
+          <p:cNvPr id="16" name="TarjetaTxt 2"/>
+          <p:cNvSpPr txBox="1"/>
+          <p:nvPr/>
+        </p:nvSpPr>
+        <p:spPr>
+          <a:xfrm>
+            <a:off x="6259068" y="2724912"/>
+            <a:ext cx="2526030" cy="1060704"/>
+          </a:xfrm>
+          <a:prstGeom prst="rect">
+            <a:avLst/>
+          </a:prstGeom>
+          <a:noFill/>
+        </p:spPr>
+        <p:txBody>
+          <a:bodyPr wrap="square" anchor="t" lIns="45720" rIns="45720" tIns="27432" bIns="27432">
+            <a:normAutofit/>
+          </a:bodyPr>
+          <a:lstStyle/>
+          <a:p>
+            <a:pPr algn="l"/>
+            <a:r>
+              <a:rPr sz="1100" b="1">
+                <a:solidFill>
+                  <a:srgbClr val="5B3E83"/>
+                </a:solidFill>
+                <a:latin typeface="Bricolage Grotesque"/>
+              </a:rPr>
+              <a:t>la información</a:t>
+            </a:r>
+          </a:p>
+          <a:p>
+            <a:pPr algn="l"/>
+            <a:r>
+              <a:rPr sz="1000">
+                <a:solidFill>
+                  <a:srgbClr val="20242E"/>
+                </a:solidFill>
+                <a:latin typeface="Inter"/>
+              </a:rPr>
+              <a:t>antes había menos, pero más filtrada</a:t>
+            </a:r>
+          </a:p>
+        </p:txBody>
+      </p:sp>
+      <p:sp>
+        <p:nvSpPr>
+          <p:cNvPr id="17" name="Tarjeta 3"/>
+          <p:cNvSpPr/>
+          <p:nvPr/>
+        </p:nvSpPr>
+        <p:spPr>
+          <a:xfrm>
+            <a:off x="9022842" y="2670048"/>
+            <a:ext cx="2708910" cy="1170432"/>
+          </a:xfrm>
+          <a:prstGeom prst="roundRect">
+            <a:avLst>
+              <a:gd name="adj" fmla="val 6000"/>
+            </a:avLst>
+          </a:prstGeom>
+          <a:solidFill>
+            <a:srgbClr val="FFFFFF"/>
+          </a:solidFill>
+          <a:ln w="12700">
+            <a:solidFill>
+              <a:srgbClr val="E4E3DE"/>
+            </a:solidFill>
+          </a:ln>
+          <a:effectLst/>
+        </p:spPr>
+        <p:style>
+          <a:lnRef idx="1">
+            <a:schemeClr val="accent1"/>
+          </a:lnRef>
+          <a:fillRef idx="3">
+            <a:schemeClr val="accent1"/>
+          </a:fillRef>
+          <a:effectRef idx="2">
+            <a:schemeClr val="accent1"/>
+          </a:effectRef>
+          <a:fontRef idx="minor">
+            <a:schemeClr val="lt1"/>
+          </a:fontRef>
+        </p:style>
+        <p:txBody>
+          <a:bodyPr rtlCol="0" anchor="ctr"/>
+          <a:lstStyle/>
+          <a:p/>
+        </p:txBody>
+      </p:sp>
+      <p:sp>
+        <p:nvSpPr>
+          <p:cNvPr id="18" name="TarjetaTxt 3"/>
+          <p:cNvSpPr txBox="1"/>
+          <p:nvPr/>
+        </p:nvSpPr>
+        <p:spPr>
+          <a:xfrm>
+            <a:off x="9114282" y="2724912"/>
+            <a:ext cx="2526030" cy="1060704"/>
+          </a:xfrm>
+          <a:prstGeom prst="rect">
+            <a:avLst/>
+          </a:prstGeom>
+          <a:noFill/>
+        </p:spPr>
+        <p:txBody>
+          <a:bodyPr wrap="square" anchor="t" lIns="45720" rIns="45720" tIns="27432" bIns="27432">
+            <a:normAutofit/>
+          </a:bodyPr>
+          <a:lstStyle/>
+          <a:p>
+            <a:pPr algn="l"/>
+            <a:r>
+              <a:rPr sz="1100" b="1">
+                <a:solidFill>
+                  <a:srgbClr val="5B3E83"/>
+                </a:solidFill>
+                <a:latin typeface="Bricolage Grotesque"/>
+              </a:rPr>
+              <a:t>el trabajo</a:t>
+            </a:r>
+          </a:p>
+          <a:p>
+            <a:pPr algn="l"/>
+            <a:r>
+              <a:rPr sz="1000">
+                <a:solidFill>
+                  <a:srgbClr val="20242E"/>
+                </a:solidFill>
+                <a:latin typeface="Inter"/>
+              </a:rPr>
+              <a:t>antes se cambiaba menos de empleo</a:t>
+            </a:r>
+          </a:p>
+        </p:txBody>
+      </p:sp>
+      <p:sp>
+        <p:nvSpPr>
+          <p:cNvPr id="19" name="Tarjeta 4"/>
+          <p:cNvSpPr/>
+          <p:nvPr/>
+        </p:nvSpPr>
+        <p:spPr>
+          <a:xfrm>
+            <a:off x="457200" y="3968496"/>
+            <a:ext cx="2708910" cy="1170432"/>
+          </a:xfrm>
+          <a:prstGeom prst="roundRect">
+            <a:avLst>
+              <a:gd name="adj" fmla="val 6000"/>
+            </a:avLst>
+          </a:prstGeom>
+          <a:solidFill>
+            <a:srgbClr val="FFFFFF"/>
+          </a:solidFill>
+          <a:ln w="12700">
+            <a:solidFill>
+              <a:srgbClr val="E4E3DE"/>
+            </a:solidFill>
+          </a:ln>
+          <a:effectLst/>
+        </p:spPr>
+        <p:style>
+          <a:lnRef idx="1">
+            <a:schemeClr val="accent1"/>
+          </a:lnRef>
+          <a:fillRef idx="3">
+            <a:schemeClr val="accent1"/>
+          </a:fillRef>
+          <a:effectRef idx="2">
+            <a:schemeClr val="accent1"/>
+          </a:effectRef>
+          <a:fontRef idx="minor">
+            <a:schemeClr val="lt1"/>
+          </a:fontRef>
+        </p:style>
+        <p:txBody>
+          <a:bodyPr rtlCol="0" anchor="ctr"/>
+          <a:lstStyle/>
+          <a:p/>
+        </p:txBody>
+      </p:sp>
+      <p:sp>
+        <p:nvSpPr>
+          <p:cNvPr id="20" name="TarjetaTxt 4"/>
+          <p:cNvSpPr txBox="1"/>
+          <p:nvPr/>
+        </p:nvSpPr>
+        <p:spPr>
+          <a:xfrm>
+            <a:off x="548640" y="4023360"/>
+            <a:ext cx="2526030" cy="1060704"/>
+          </a:xfrm>
+          <a:prstGeom prst="rect">
+            <a:avLst/>
+          </a:prstGeom>
+          <a:noFill/>
+        </p:spPr>
+        <p:txBody>
+          <a:bodyPr wrap="square" anchor="t" lIns="45720" rIns="45720" tIns="27432" bIns="27432">
+            <a:normAutofit/>
+          </a:bodyPr>
+          <a:lstStyle/>
+          <a:p>
+            <a:pPr algn="l"/>
+            <a:r>
+              <a:rPr sz="1100" b="1">
+                <a:solidFill>
+                  <a:srgbClr val="5B3E83"/>
+                </a:solidFill>
+                <a:latin typeface="Bricolage Grotesque"/>
+              </a:rPr>
+              <a:t>el medio ambiente</a:t>
+            </a:r>
+          </a:p>
+          <a:p>
+            <a:pPr algn="l"/>
+            <a:r>
+              <a:rPr sz="1000">
+                <a:solidFill>
+                  <a:srgbClr val="20242E"/>
+                </a:solidFill>
+                <a:latin typeface="Inter"/>
+              </a:rPr>
+              <a:t>antes se consumía menos, pero se reciclaba casi nada</a:t>
+            </a:r>
+          </a:p>
+        </p:txBody>
+      </p:sp>
+      <p:sp>
+        <p:nvSpPr>
+          <p:cNvPr id="21" name="Tarjeta 5"/>
+          <p:cNvSpPr/>
+          <p:nvPr/>
+        </p:nvSpPr>
+        <p:spPr>
+          <a:xfrm>
+            <a:off x="3312414" y="3968496"/>
+            <a:ext cx="2708910" cy="1170432"/>
+          </a:xfrm>
+          <a:prstGeom prst="roundRect">
+            <a:avLst>
+              <a:gd name="adj" fmla="val 6000"/>
+            </a:avLst>
+          </a:prstGeom>
+          <a:solidFill>
+            <a:srgbClr val="FFFFFF"/>
+          </a:solidFill>
+          <a:ln w="12700">
+            <a:solidFill>
+              <a:srgbClr val="E4E3DE"/>
+            </a:solidFill>
+          </a:ln>
+          <a:effectLst/>
+        </p:spPr>
+        <p:style>
+          <a:lnRef idx="1">
+            <a:schemeClr val="accent1"/>
+          </a:lnRef>
+          <a:fillRef idx="3">
+            <a:schemeClr val="accent1"/>
+          </a:fillRef>
+          <a:effectRef idx="2">
+            <a:schemeClr val="accent1"/>
+          </a:effectRef>
+          <a:fontRef idx="minor">
+            <a:schemeClr val="lt1"/>
+          </a:fontRef>
+        </p:style>
+        <p:txBody>
+          <a:bodyPr rtlCol="0" anchor="ctr"/>
+          <a:lstStyle/>
+          <a:p/>
+        </p:txBody>
+      </p:sp>
+      <p:sp>
+        <p:nvSpPr>
+          <p:cNvPr id="22" name="TarjetaTxt 5"/>
+          <p:cNvSpPr txBox="1"/>
+          <p:nvPr/>
+        </p:nvSpPr>
+        <p:spPr>
+          <a:xfrm>
+            <a:off x="3403854" y="4023360"/>
+            <a:ext cx="2526030" cy="1060704"/>
+          </a:xfrm>
+          <a:prstGeom prst="rect">
+            <a:avLst/>
+          </a:prstGeom>
+          <a:noFill/>
+        </p:spPr>
+        <p:txBody>
+          <a:bodyPr wrap="square" anchor="t" lIns="45720" rIns="45720" tIns="27432" bIns="27432">
+            <a:normAutofit/>
+          </a:bodyPr>
+          <a:lstStyle/>
+          <a:p>
+            <a:pPr algn="l"/>
+            <a:r>
+              <a:rPr sz="1100" b="1">
+                <a:solidFill>
+                  <a:srgbClr val="5B3E83"/>
+                </a:solidFill>
+                <a:latin typeface="Bricolage Grotesque"/>
+              </a:rPr>
+              <a:t>la escuela</a:t>
+            </a:r>
+          </a:p>
+          <a:p>
+            <a:pPr algn="l"/>
+            <a:r>
+              <a:rPr sz="1000">
+                <a:solidFill>
+                  <a:srgbClr val="20242E"/>
+                </a:solidFill>
+                <a:latin typeface="Inter"/>
+              </a:rPr>
+              <a:t>antes había más disciplina y menos apoyo</a:t>
+            </a:r>
+          </a:p>
+        </p:txBody>
+      </p:sp>
+      <p:sp>
+        <p:nvSpPr>
+          <p:cNvPr id="23" name="Tarjeta 6"/>
+          <p:cNvSpPr/>
+          <p:nvPr/>
+        </p:nvSpPr>
+        <p:spPr>
+          <a:xfrm>
+            <a:off x="6167628" y="3968496"/>
+            <a:ext cx="2708910" cy="1170432"/>
+          </a:xfrm>
+          <a:prstGeom prst="roundRect">
+            <a:avLst>
+              <a:gd name="adj" fmla="val 6000"/>
+            </a:avLst>
+          </a:prstGeom>
+          <a:solidFill>
+            <a:srgbClr val="FFFFFF"/>
+          </a:solidFill>
+          <a:ln w="12700">
+            <a:solidFill>
+              <a:srgbClr val="E4E3DE"/>
+            </a:solidFill>
+          </a:ln>
+          <a:effectLst/>
+        </p:spPr>
+        <p:style>
+          <a:lnRef idx="1">
+            <a:schemeClr val="accent1"/>
+          </a:lnRef>
+          <a:fillRef idx="3">
+            <a:schemeClr val="accent1"/>
+          </a:fillRef>
+          <a:effectRef idx="2">
+            <a:schemeClr val="accent1"/>
+          </a:effectRef>
+          <a:fontRef idx="minor">
+            <a:schemeClr val="lt1"/>
+          </a:fontRef>
+        </p:style>
+        <p:txBody>
+          <a:bodyPr rtlCol="0" anchor="ctr"/>
+          <a:lstStyle/>
+          <a:p/>
+        </p:txBody>
+      </p:sp>
+      <p:sp>
+        <p:nvSpPr>
+          <p:cNvPr id="24" name="TarjetaTxt 6"/>
+          <p:cNvSpPr txBox="1"/>
+          <p:nvPr/>
+        </p:nvSpPr>
+        <p:spPr>
+          <a:xfrm>
+            <a:off x="6259068" y="4023360"/>
+            <a:ext cx="2526030" cy="1060704"/>
+          </a:xfrm>
+          <a:prstGeom prst="rect">
+            <a:avLst/>
+          </a:prstGeom>
+          <a:noFill/>
+        </p:spPr>
+        <p:txBody>
+          <a:bodyPr wrap="square" anchor="t" lIns="45720" rIns="45720" tIns="27432" bIns="27432">
+            <a:normAutofit/>
+          </a:bodyPr>
+          <a:lstStyle/>
+          <a:p>
+            <a:pPr algn="l"/>
+            <a:r>
+              <a:rPr sz="1100" b="1">
+                <a:solidFill>
+                  <a:srgbClr val="5B3E83"/>
+                </a:solidFill>
+                <a:latin typeface="Bricolage Grotesque"/>
+              </a:rPr>
+              <a:t>marco</a:t>
+            </a:r>
+          </a:p>
+          <a:p>
+            <a:pPr algn="l"/>
+            <a:r>
+              <a:rPr sz="1000">
+                <a:solidFill>
+                  <a:srgbClr val="20242E"/>
+                </a:solidFill>
+                <a:latin typeface="Inter"/>
+              </a:rPr>
+              <a:t>Antes … era más … que ahora, porque …</a:t>
+            </a:r>
+          </a:p>
+        </p:txBody>
+      </p:sp>
+      <p:sp>
+        <p:nvSpPr>
+          <p:cNvPr id="25" name="Tarjeta 7"/>
+          <p:cNvSpPr/>
+          <p:nvPr/>
+        </p:nvSpPr>
+        <p:spPr>
+          <a:xfrm>
+            <a:off x="9022842" y="3968496"/>
+            <a:ext cx="2708910" cy="1170432"/>
+          </a:xfrm>
+          <a:prstGeom prst="roundRect">
+            <a:avLst>
+              <a:gd name="adj" fmla="val 6000"/>
+            </a:avLst>
+          </a:prstGeom>
+          <a:solidFill>
+            <a:srgbClr val="FFFFFF"/>
+          </a:solidFill>
+          <a:ln w="12700">
+            <a:solidFill>
+              <a:srgbClr val="E4E3DE"/>
+            </a:solidFill>
+          </a:ln>
+          <a:effectLst/>
+        </p:spPr>
+        <p:style>
+          <a:lnRef idx="1">
+            <a:schemeClr val="accent1"/>
+          </a:lnRef>
+          <a:fillRef idx="3">
+            <a:schemeClr val="accent1"/>
+          </a:fillRef>
+          <a:effectRef idx="2">
+            <a:schemeClr val="accent1"/>
+          </a:effectRef>
+          <a:fontRef idx="minor">
+            <a:schemeClr val="lt1"/>
+          </a:fontRef>
+        </p:style>
+        <p:txBody>
+          <a:bodyPr rtlCol="0" anchor="ctr"/>
+          <a:lstStyle/>
+          <a:p/>
+        </p:txBody>
+      </p:sp>
+      <p:sp>
+        <p:nvSpPr>
+          <p:cNvPr id="26" name="TarjetaTxt 7"/>
+          <p:cNvSpPr txBox="1"/>
+          <p:nvPr/>
+        </p:nvSpPr>
+        <p:spPr>
+          <a:xfrm>
+            <a:off x="9114282" y="4023360"/>
+            <a:ext cx="2526030" cy="1060704"/>
+          </a:xfrm>
+          <a:prstGeom prst="rect">
+            <a:avLst/>
+          </a:prstGeom>
+          <a:noFill/>
+        </p:spPr>
+        <p:txBody>
+          <a:bodyPr wrap="square" anchor="t" lIns="45720" rIns="45720" tIns="27432" bIns="27432">
+            <a:normAutofit/>
+          </a:bodyPr>
+          <a:lstStyle/>
+          <a:p>
+            <a:pPr algn="l"/>
+            <a:r>
+              <a:rPr sz="1100" b="1">
+                <a:solidFill>
+                  <a:srgbClr val="5B3E83"/>
+                </a:solidFill>
+                <a:latin typeface="Bricolage Grotesque"/>
+              </a:rPr>
+              <a:t>marco</a:t>
+            </a:r>
+          </a:p>
+          <a:p>
+            <a:pPr algn="l"/>
+            <a:r>
+              <a:rPr sz="1000">
+                <a:solidFill>
+                  <a:srgbClr val="20242E"/>
+                </a:solidFill>
+                <a:latin typeface="Inter"/>
+              </a:rPr>
+              <a:t>Sí, pero también había menos … que hoy.</a:t>
+            </a:r>
+          </a:p>
+        </p:txBody>
+      </p:sp>
+      <p:sp>
+        <p:nvSpPr>
+          <p:cNvPr id="27" name="Tarjeta 8"/>
+          <p:cNvSpPr/>
+          <p:nvPr/>
+        </p:nvSpPr>
+        <p:spPr>
+          <a:xfrm>
+            <a:off x="457200" y="5266944"/>
+            <a:ext cx="2708910" cy="1170432"/>
+          </a:xfrm>
+          <a:prstGeom prst="roundRect">
+            <a:avLst>
+              <a:gd name="adj" fmla="val 6000"/>
+            </a:avLst>
+          </a:prstGeom>
+          <a:solidFill>
+            <a:srgbClr val="FFFFFF"/>
+          </a:solidFill>
+          <a:ln w="12700">
+            <a:solidFill>
+              <a:srgbClr val="E4E3DE"/>
+            </a:solidFill>
+          </a:ln>
+          <a:effectLst/>
+        </p:spPr>
+        <p:style>
+          <a:lnRef idx="1">
+            <a:schemeClr val="accent1"/>
+          </a:lnRef>
+          <a:fillRef idx="3">
+            <a:schemeClr val="accent1"/>
+          </a:fillRef>
+          <a:effectRef idx="2">
+            <a:schemeClr val="accent1"/>
+          </a:effectRef>
+          <a:fontRef idx="minor">
+            <a:schemeClr val="lt1"/>
+          </a:fontRef>
+        </p:style>
+        <p:txBody>
+          <a:bodyPr rtlCol="0" anchor="ctr"/>
+          <a:lstStyle/>
+          <a:p/>
+        </p:txBody>
+      </p:sp>
+      <p:sp>
+        <p:nvSpPr>
+          <p:cNvPr id="28" name="TarjetaTxt 8"/>
+          <p:cNvSpPr txBox="1"/>
+          <p:nvPr/>
+        </p:nvSpPr>
+        <p:spPr>
+          <a:xfrm>
+            <a:off x="548640" y="5321808"/>
+            <a:ext cx="2526030" cy="1060704"/>
+          </a:xfrm>
+          <a:prstGeom prst="rect">
+            <a:avLst/>
+          </a:prstGeom>
+          <a:noFill/>
+        </p:spPr>
+        <p:txBody>
+          <a:bodyPr wrap="square" anchor="t" lIns="45720" rIns="45720" tIns="27432" bIns="27432">
+            <a:normAutofit/>
+          </a:bodyPr>
+          <a:lstStyle/>
+          <a:p>
+            <a:pPr algn="l"/>
+            <a:r>
+              <a:rPr sz="1100" b="1">
+                <a:solidFill>
+                  <a:srgbClr val="5B3E83"/>
+                </a:solidFill>
+                <a:latin typeface="Bricolage Grotesque"/>
+              </a:rPr>
+              <a:t>marco</a:t>
+            </a:r>
+          </a:p>
+          <a:p>
+            <a:pPr algn="l"/>
+            <a:r>
+              <a:rPr sz="1000">
+                <a:solidFill>
+                  <a:srgbClr val="20242E"/>
+                </a:solidFill>
+                <a:latin typeface="Inter"/>
+              </a:rPr>
+              <a:t>Eso es verdad, y sin embargo …</a:t>
+            </a:r>
+          </a:p>
+        </p:txBody>
+      </p:sp>
+      <p:sp>
+        <p:nvSpPr>
+          <p:cNvPr id="29" name="Tarjeta 9"/>
+          <p:cNvSpPr/>
+          <p:nvPr/>
+        </p:nvSpPr>
+        <p:spPr>
+          <a:xfrm>
+            <a:off x="3312414" y="5266944"/>
+            <a:ext cx="2708910" cy="1170432"/>
+          </a:xfrm>
+          <a:prstGeom prst="roundRect">
+            <a:avLst>
+              <a:gd name="adj" fmla="val 6000"/>
+            </a:avLst>
+          </a:prstGeom>
+          <a:solidFill>
+            <a:srgbClr val="FFFFFF"/>
+          </a:solidFill>
+          <a:ln w="12700">
+            <a:solidFill>
+              <a:srgbClr val="E4E3DE"/>
+            </a:solidFill>
+          </a:ln>
+          <a:effectLst/>
+        </p:spPr>
+        <p:style>
+          <a:lnRef idx="1">
+            <a:schemeClr val="accent1"/>
+          </a:lnRef>
+          <a:fillRef idx="3">
+            <a:schemeClr val="accent1"/>
+          </a:fillRef>
+          <a:effectRef idx="2">
+            <a:schemeClr val="accent1"/>
+          </a:effectRef>
+          <a:fontRef idx="minor">
+            <a:schemeClr val="lt1"/>
+          </a:fontRef>
+        </p:style>
+        <p:txBody>
+          <a:bodyPr rtlCol="0" anchor="ctr"/>
+          <a:lstStyle/>
+          <a:p/>
+        </p:txBody>
+      </p:sp>
+      <p:sp>
+        <p:nvSpPr>
+          <p:cNvPr id="30" name="TarjetaTxt 9"/>
+          <p:cNvSpPr txBox="1"/>
+          <p:nvPr/>
+        </p:nvSpPr>
+        <p:spPr>
+          <a:xfrm>
+            <a:off x="3403854" y="5321808"/>
+            <a:ext cx="2526030" cy="1060704"/>
+          </a:xfrm>
+          <a:prstGeom prst="rect">
+            <a:avLst/>
+          </a:prstGeom>
+          <a:noFill/>
+        </p:spPr>
+        <p:txBody>
+          <a:bodyPr wrap="square" anchor="t" lIns="45720" rIns="45720" tIns="27432" bIns="27432">
+            <a:normAutofit/>
+          </a:bodyPr>
+          <a:lstStyle/>
+          <a:p>
+            <a:pPr algn="l"/>
+            <a:r>
+              <a:rPr sz="1100" b="1">
+                <a:solidFill>
+                  <a:srgbClr val="5B3E83"/>
+                </a:solidFill>
+                <a:latin typeface="Bricolage Grotesque"/>
+              </a:rPr>
+              <a:t>marco</a:t>
+            </a:r>
+          </a:p>
+          <a:p>
+            <a:pPr algn="l"/>
+            <a:r>
+              <a:rPr sz="1000">
+                <a:solidFill>
+                  <a:srgbClr val="20242E"/>
+                </a:solidFill>
+                <a:latin typeface="Inter"/>
+              </a:rPr>
+              <a:t>El mejor argumento del otro lado es … , porque …</a:t>
             </a:r>
           </a:p>
         </p:txBody>
